--- a/Lecture5.pptx
+++ b/Lecture5.pptx
@@ -5,7 +5,7 @@
     <p:sldMasterId id="2147483846" r:id="rId1"/>
   </p:sldMasterIdLst>
   <p:notesMasterIdLst>
-    <p:notesMasterId r:id="rId16"/>
+    <p:notesMasterId r:id="rId12"/>
   </p:notesMasterIdLst>
   <p:sldIdLst>
     <p:sldId id="256" r:id="rId2"/>
@@ -17,11 +17,7 @@
     <p:sldId id="298" r:id="rId8"/>
     <p:sldId id="264" r:id="rId9"/>
     <p:sldId id="299" r:id="rId10"/>
-    <p:sldId id="300" r:id="rId11"/>
-    <p:sldId id="301" r:id="rId12"/>
-    <p:sldId id="274" r:id="rId13"/>
-    <p:sldId id="275" r:id="rId14"/>
-    <p:sldId id="297" r:id="rId15"/>
+    <p:sldId id="297" r:id="rId11"/>
   </p:sldIdLst>
   <p:sldSz cx="12192000" cy="6858000"/>
   <p:notesSz cx="6858000" cy="9144000"/>
@@ -210,7 +206,7 @@
           <a:p>
             <a:fld id="{21F69E75-2F2A-4340-80BD-3C270EF90E93}" type="datetimeFigureOut">
               <a:rPr lang="en-US" smtClean="0"/>
-              <a:t>8/17/26</a:t>
+              <a:t>8/24/26</a:t>
             </a:fld>
             <a:endParaRPr lang="en-US"/>
           </a:p>
@@ -562,342 +558,6 @@
 </p:notes>
 </file>
 
-<file path=ppt/notesSlides/notesSlide10.xml><?xml version="1.0" encoding="utf-8"?>
-<p:notes xmlns:a="http://schemas.openxmlformats.org/drawingml/2006/main" xmlns:r="http://schemas.openxmlformats.org/officeDocument/2006/relationships" xmlns:p="http://schemas.openxmlformats.org/presentationml/2006/main">
-  <p:cSld>
-    <p:spTree>
-      <p:nvGrpSpPr>
-        <p:cNvPr id="1" name=""/>
-        <p:cNvGrpSpPr/>
-        <p:nvPr/>
-      </p:nvGrpSpPr>
-      <p:grpSpPr>
-        <a:xfrm>
-          <a:off x="0" y="0"/>
-          <a:ext cx="0" cy="0"/>
-          <a:chOff x="0" y="0"/>
-          <a:chExt cx="0" cy="0"/>
-        </a:xfrm>
-      </p:grpSpPr>
-      <p:sp>
-        <p:nvSpPr>
-          <p:cNvPr id="2" name="Slide Image Placeholder 1"/>
-          <p:cNvSpPr>
-            <a:spLocks noGrp="1" noRot="1" noChangeAspect="1"/>
-          </p:cNvSpPr>
-          <p:nvPr>
-            <p:ph type="sldImg"/>
-          </p:nvPr>
-        </p:nvSpPr>
-        <p:spPr/>
-      </p:sp>
-      <p:sp>
-        <p:nvSpPr>
-          <p:cNvPr id="3" name="Notes Placeholder 2"/>
-          <p:cNvSpPr>
-            <a:spLocks noGrp="1"/>
-          </p:cNvSpPr>
-          <p:nvPr>
-            <p:ph type="body" idx="1"/>
-          </p:nvPr>
-        </p:nvSpPr>
-        <p:spPr/>
-        <p:txBody>
-          <a:bodyPr/>
-          <a:lstStyle/>
-          <a:p>
-            <a:endParaRPr lang="en-US" dirty="0"/>
-          </a:p>
-        </p:txBody>
-      </p:sp>
-      <p:sp>
-        <p:nvSpPr>
-          <p:cNvPr id="4" name="Slide Number Placeholder 3"/>
-          <p:cNvSpPr>
-            <a:spLocks noGrp="1"/>
-          </p:cNvSpPr>
-          <p:nvPr>
-            <p:ph type="sldNum" sz="quarter" idx="5"/>
-          </p:nvPr>
-        </p:nvSpPr>
-        <p:spPr/>
-        <p:txBody>
-          <a:bodyPr/>
-          <a:lstStyle/>
-          <a:p>
-            <a:fld id="{21A5E430-97AE-C04C-BB4B-47DC21A043A5}" type="slidenum">
-              <a:rPr lang="en-US" smtClean="0"/>
-              <a:t>11</a:t>
-            </a:fld>
-            <a:endParaRPr lang="en-US"/>
-          </a:p>
-        </p:txBody>
-      </p:sp>
-    </p:spTree>
-    <p:extLst>
-      <p:ext uri="{BB962C8B-B14F-4D97-AF65-F5344CB8AC3E}">
-        <p14:creationId xmlns:p14="http://schemas.microsoft.com/office/powerpoint/2010/main" val="2940781256"/>
-      </p:ext>
-    </p:extLst>
-  </p:cSld>
-  <p:clrMapOvr>
-    <a:masterClrMapping/>
-  </p:clrMapOvr>
-</p:notes>
-</file>
-
-<file path=ppt/notesSlides/notesSlide11.xml><?xml version="1.0" encoding="utf-8"?>
-<p:notes xmlns:a="http://schemas.openxmlformats.org/drawingml/2006/main" xmlns:r="http://schemas.openxmlformats.org/officeDocument/2006/relationships" xmlns:p="http://schemas.openxmlformats.org/presentationml/2006/main">
-  <p:cSld>
-    <p:spTree>
-      <p:nvGrpSpPr>
-        <p:cNvPr id="1" name=""/>
-        <p:cNvGrpSpPr/>
-        <p:nvPr/>
-      </p:nvGrpSpPr>
-      <p:grpSpPr>
-        <a:xfrm>
-          <a:off x="0" y="0"/>
-          <a:ext cx="0" cy="0"/>
-          <a:chOff x="0" y="0"/>
-          <a:chExt cx="0" cy="0"/>
-        </a:xfrm>
-      </p:grpSpPr>
-      <p:sp>
-        <p:nvSpPr>
-          <p:cNvPr id="2" name="Slide Image Placeholder 1"/>
-          <p:cNvSpPr>
-            <a:spLocks noGrp="1" noRot="1" noChangeAspect="1"/>
-          </p:cNvSpPr>
-          <p:nvPr>
-            <p:ph type="sldImg"/>
-          </p:nvPr>
-        </p:nvSpPr>
-        <p:spPr/>
-      </p:sp>
-      <p:sp>
-        <p:nvSpPr>
-          <p:cNvPr id="3" name="Notes Placeholder 2"/>
-          <p:cNvSpPr>
-            <a:spLocks noGrp="1"/>
-          </p:cNvSpPr>
-          <p:nvPr>
-            <p:ph type="body" idx="1"/>
-          </p:nvPr>
-        </p:nvSpPr>
-        <p:spPr/>
-        <p:txBody>
-          <a:bodyPr/>
-          <a:lstStyle/>
-          <a:p>
-            <a:endParaRPr lang="en-US" dirty="0"/>
-          </a:p>
-        </p:txBody>
-      </p:sp>
-      <p:sp>
-        <p:nvSpPr>
-          <p:cNvPr id="4" name="Slide Number Placeholder 3"/>
-          <p:cNvSpPr>
-            <a:spLocks noGrp="1"/>
-          </p:cNvSpPr>
-          <p:nvPr>
-            <p:ph type="sldNum" sz="quarter" idx="10"/>
-          </p:nvPr>
-        </p:nvSpPr>
-        <p:spPr/>
-        <p:txBody>
-          <a:bodyPr/>
-          <a:lstStyle/>
-          <a:p>
-            <a:fld id="{F7021451-1387-4CA6-816F-3879F97B5CBC}" type="slidenum">
-              <a:rPr lang="en-US"/>
-              <a:t>12</a:t>
-            </a:fld>
-            <a:endParaRPr lang="en-US"/>
-          </a:p>
-        </p:txBody>
-      </p:sp>
-    </p:spTree>
-    <p:extLst>
-      <p:ext uri="{BB962C8B-B14F-4D97-AF65-F5344CB8AC3E}">
-        <p14:creationId xmlns:p14="http://schemas.microsoft.com/office/powerpoint/2010/main" val="1024086991"/>
-      </p:ext>
-    </p:extLst>
-  </p:cSld>
-  <p:clrMapOvr>
-    <a:masterClrMapping/>
-  </p:clrMapOvr>
-</p:notes>
-</file>
-
-<file path=ppt/notesSlides/notesSlide12.xml><?xml version="1.0" encoding="utf-8"?>
-<p:notes xmlns:a="http://schemas.openxmlformats.org/drawingml/2006/main" xmlns:r="http://schemas.openxmlformats.org/officeDocument/2006/relationships" xmlns:p="http://schemas.openxmlformats.org/presentationml/2006/main">
-  <p:cSld>
-    <p:spTree>
-      <p:nvGrpSpPr>
-        <p:cNvPr id="1" name=""/>
-        <p:cNvGrpSpPr/>
-        <p:nvPr/>
-      </p:nvGrpSpPr>
-      <p:grpSpPr>
-        <a:xfrm>
-          <a:off x="0" y="0"/>
-          <a:ext cx="0" cy="0"/>
-          <a:chOff x="0" y="0"/>
-          <a:chExt cx="0" cy="0"/>
-        </a:xfrm>
-      </p:grpSpPr>
-      <p:sp>
-        <p:nvSpPr>
-          <p:cNvPr id="2" name="Slide Image Placeholder 1"/>
-          <p:cNvSpPr>
-            <a:spLocks noGrp="1" noRot="1" noChangeAspect="1"/>
-          </p:cNvSpPr>
-          <p:nvPr>
-            <p:ph type="sldImg"/>
-          </p:nvPr>
-        </p:nvSpPr>
-        <p:spPr/>
-      </p:sp>
-      <p:sp>
-        <p:nvSpPr>
-          <p:cNvPr id="3" name="Notes Placeholder 2"/>
-          <p:cNvSpPr>
-            <a:spLocks noGrp="1"/>
-          </p:cNvSpPr>
-          <p:nvPr>
-            <p:ph type="body" idx="1"/>
-          </p:nvPr>
-        </p:nvSpPr>
-        <p:spPr/>
-        <p:txBody>
-          <a:bodyPr/>
-          <a:lstStyle/>
-          <a:p>
-            <a:endParaRPr lang="en-US" dirty="0"/>
-          </a:p>
-        </p:txBody>
-      </p:sp>
-      <p:sp>
-        <p:nvSpPr>
-          <p:cNvPr id="4" name="Slide Number Placeholder 3"/>
-          <p:cNvSpPr>
-            <a:spLocks noGrp="1"/>
-          </p:cNvSpPr>
-          <p:nvPr>
-            <p:ph type="sldNum" sz="quarter" idx="10"/>
-          </p:nvPr>
-        </p:nvSpPr>
-        <p:spPr/>
-        <p:txBody>
-          <a:bodyPr/>
-          <a:lstStyle/>
-          <a:p>
-            <a:fld id="{F7021451-1387-4CA6-816F-3879F97B5CBC}" type="slidenum">
-              <a:rPr lang="en-US"/>
-              <a:t>13</a:t>
-            </a:fld>
-            <a:endParaRPr lang="en-US"/>
-          </a:p>
-        </p:txBody>
-      </p:sp>
-    </p:spTree>
-    <p:extLst>
-      <p:ext uri="{BB962C8B-B14F-4D97-AF65-F5344CB8AC3E}">
-        <p14:creationId xmlns:p14="http://schemas.microsoft.com/office/powerpoint/2010/main" val="1024086991"/>
-      </p:ext>
-    </p:extLst>
-  </p:cSld>
-  <p:clrMapOvr>
-    <a:masterClrMapping/>
-  </p:clrMapOvr>
-</p:notes>
-</file>
-
-<file path=ppt/notesSlides/notesSlide13.xml><?xml version="1.0" encoding="utf-8"?>
-<p:notes xmlns:a="http://schemas.openxmlformats.org/drawingml/2006/main" xmlns:r="http://schemas.openxmlformats.org/officeDocument/2006/relationships" xmlns:p="http://schemas.openxmlformats.org/presentationml/2006/main">
-  <p:cSld>
-    <p:spTree>
-      <p:nvGrpSpPr>
-        <p:cNvPr id="1" name=""/>
-        <p:cNvGrpSpPr/>
-        <p:nvPr/>
-      </p:nvGrpSpPr>
-      <p:grpSpPr>
-        <a:xfrm>
-          <a:off x="0" y="0"/>
-          <a:ext cx="0" cy="0"/>
-          <a:chOff x="0" y="0"/>
-          <a:chExt cx="0" cy="0"/>
-        </a:xfrm>
-      </p:grpSpPr>
-      <p:sp>
-        <p:nvSpPr>
-          <p:cNvPr id="2" name="Slide Image Placeholder 1"/>
-          <p:cNvSpPr>
-            <a:spLocks noGrp="1" noRot="1" noChangeAspect="1"/>
-          </p:cNvSpPr>
-          <p:nvPr>
-            <p:ph type="sldImg"/>
-          </p:nvPr>
-        </p:nvSpPr>
-        <p:spPr/>
-      </p:sp>
-      <p:sp>
-        <p:nvSpPr>
-          <p:cNvPr id="3" name="Notes Placeholder 2"/>
-          <p:cNvSpPr>
-            <a:spLocks noGrp="1"/>
-          </p:cNvSpPr>
-          <p:nvPr>
-            <p:ph type="body" idx="1"/>
-          </p:nvPr>
-        </p:nvSpPr>
-        <p:spPr/>
-        <p:txBody>
-          <a:bodyPr/>
-          <a:lstStyle/>
-          <a:p>
-            <a:endParaRPr lang="en-US" dirty="0"/>
-          </a:p>
-        </p:txBody>
-      </p:sp>
-      <p:sp>
-        <p:nvSpPr>
-          <p:cNvPr id="4" name="Slide Number Placeholder 3"/>
-          <p:cNvSpPr>
-            <a:spLocks noGrp="1"/>
-          </p:cNvSpPr>
-          <p:nvPr>
-            <p:ph type="sldNum" sz="quarter" idx="5"/>
-          </p:nvPr>
-        </p:nvSpPr>
-        <p:spPr/>
-        <p:txBody>
-          <a:bodyPr/>
-          <a:lstStyle/>
-          <a:p>
-            <a:fld id="{21A5E430-97AE-C04C-BB4B-47DC21A043A5}" type="slidenum">
-              <a:rPr lang="en-US" smtClean="0"/>
-              <a:t>14</a:t>
-            </a:fld>
-            <a:endParaRPr lang="en-US"/>
-          </a:p>
-        </p:txBody>
-      </p:sp>
-    </p:spTree>
-    <p:extLst>
-      <p:ext uri="{BB962C8B-B14F-4D97-AF65-F5344CB8AC3E}">
-        <p14:creationId xmlns:p14="http://schemas.microsoft.com/office/powerpoint/2010/main" val="3086017340"/>
-      </p:ext>
-    </p:extLst>
-  </p:cSld>
-  <p:clrMapOvr>
-    <a:masterClrMapping/>
-  </p:clrMapOvr>
-</p:notes>
-</file>
-
 <file path=ppt/notesSlides/notesSlide2.xml><?xml version="1.0" encoding="utf-8"?>
 <p:notes xmlns:a="http://schemas.openxmlformats.org/drawingml/2006/main" xmlns:r="http://schemas.openxmlformats.org/officeDocument/2006/relationships" xmlns:p="http://schemas.openxmlformats.org/presentationml/2006/main">
   <p:cSld>
@@ -1578,76 +1238,7 @@
           <a:bodyPr/>
           <a:lstStyle/>
           <a:p>
-            <a:pPr marL="228600" indent="-228600">
-              <a:lnSpc>
-                <a:spcPct val="115000"/>
-              </a:lnSpc>
-              <a:spcAft>
-                <a:spcPts val="1400"/>
-              </a:spcAft>
-              <a:buSzPct val="100000"/>
-              <a:buChar char="•"/>
-            </a:pPr>
-            <a:r>
-              <a:rPr lang="en-US" sz="1050" dirty="0">
-                <a:solidFill>
-                  <a:srgbClr val="1B2733"/>
-                </a:solidFill>
-                <a:latin typeface="Calibri" pitchFamily="34" charset="0"/>
-                <a:ea typeface="Calibri" pitchFamily="34" charset="-122"/>
-                <a:cs typeface="Calibri" pitchFamily="34" charset="-120"/>
-              </a:rPr>
-              <a:t>Underfitting zone: both errors high</a:t>
-            </a:r>
-            <a:endParaRPr lang="en-US" sz="1050" dirty="0"/>
-          </a:p>
-          <a:p>
-            <a:pPr marL="228600" indent="-228600">
-              <a:lnSpc>
-                <a:spcPct val="115000"/>
-              </a:lnSpc>
-              <a:spcAft>
-                <a:spcPts val="1400"/>
-              </a:spcAft>
-              <a:buSzPct val="100000"/>
-              <a:buChar char="•"/>
-            </a:pPr>
-            <a:r>
-              <a:rPr lang="en-US" sz="1050" dirty="0">
-                <a:solidFill>
-                  <a:srgbClr val="1B2733"/>
-                </a:solidFill>
-                <a:latin typeface="Calibri" pitchFamily="34" charset="0"/>
-                <a:ea typeface="Calibri" pitchFamily="34" charset="-122"/>
-                <a:cs typeface="Calibri" pitchFamily="34" charset="-120"/>
-              </a:rPr>
-              <a:t>Overfitting zone: gap between train &amp; generalization error widens</a:t>
-            </a:r>
-            <a:endParaRPr lang="en-US" sz="1050" dirty="0"/>
-          </a:p>
-          <a:p>
-            <a:pPr marL="228600" indent="-228600">
-              <a:lnSpc>
-                <a:spcPct val="115000"/>
-              </a:lnSpc>
-              <a:spcAft>
-                <a:spcPts val="1400"/>
-              </a:spcAft>
-              <a:buSzPct val="100000"/>
-              <a:buChar char="•"/>
-            </a:pPr>
-            <a:r>
-              <a:rPr lang="en-US" sz="1050" dirty="0">
-                <a:solidFill>
-                  <a:srgbClr val="1B2733"/>
-                </a:solidFill>
-                <a:latin typeface="Calibri" pitchFamily="34" charset="0"/>
-                <a:ea typeface="Calibri" pitchFamily="34" charset="-122"/>
-                <a:cs typeface="Calibri" pitchFamily="34" charset="-120"/>
-              </a:rPr>
-              <a:t>No Free Lunch theorem: averaged over all possible tasks, no algorithm beats any other — we must pick a capacity fit to the task</a:t>
-            </a:r>
-            <a:endParaRPr lang="en-US" sz="1050" dirty="0"/>
+            <a:endParaRPr lang="en-US" dirty="0"/>
           </a:p>
         </p:txBody>
       </p:sp>
@@ -1677,7 +1268,7 @@
     </p:spTree>
     <p:extLst>
       <p:ext uri="{BB962C8B-B14F-4D97-AF65-F5344CB8AC3E}">
-        <p14:creationId xmlns:p14="http://schemas.microsoft.com/office/powerpoint/2010/main" val="3942487604"/>
+        <p14:creationId xmlns:p14="http://schemas.microsoft.com/office/powerpoint/2010/main" val="3086017340"/>
       </p:ext>
     </p:extLst>
   </p:cSld>
@@ -1837,7 +1428,7 @@
             <a:fld id="{B61BEF0D-F0BB-DE4B-95CE-6DB70DBA9567}" type="datetimeFigureOut">
               <a:rPr lang="en-US" smtClean="0"/>
               <a:pPr/>
-              <a:t>8/17/26</a:t>
+              <a:t>8/24/26</a:t>
             </a:fld>
             <a:endParaRPr lang="en-US" dirty="0"/>
           </a:p>
@@ -2039,7 +1630,7 @@
             <a:fld id="{B61BEF0D-F0BB-DE4B-95CE-6DB70DBA9567}" type="datetimeFigureOut">
               <a:rPr lang="en-US" smtClean="0"/>
               <a:pPr/>
-              <a:t>8/17/26</a:t>
+              <a:t>8/24/26</a:t>
             </a:fld>
             <a:endParaRPr lang="en-US" dirty="0"/>
           </a:p>
@@ -2251,7 +1842,7 @@
             <a:fld id="{B61BEF0D-F0BB-DE4B-95CE-6DB70DBA9567}" type="datetimeFigureOut">
               <a:rPr lang="en-US" smtClean="0"/>
               <a:pPr/>
-              <a:t>8/17/26</a:t>
+              <a:t>8/24/26</a:t>
             </a:fld>
             <a:endParaRPr lang="en-US" dirty="0"/>
           </a:p>
@@ -2488,7 +2079,7 @@
             <a:fld id="{B61BEF0D-F0BB-DE4B-95CE-6DB70DBA9567}" type="datetimeFigureOut">
               <a:rPr lang="en-US" smtClean="0"/>
               <a:pPr/>
-              <a:t>8/17/26</a:t>
+              <a:t>8/24/26</a:t>
             </a:fld>
             <a:endParaRPr lang="en-US" dirty="0"/>
           </a:p>
@@ -2766,7 +2357,7 @@
             <a:fld id="{B61BEF0D-F0BB-DE4B-95CE-6DB70DBA9567}" type="datetimeFigureOut">
               <a:rPr lang="en-US" smtClean="0"/>
               <a:pPr/>
-              <a:t>8/17/26</a:t>
+              <a:t>8/24/26</a:t>
             </a:fld>
             <a:endParaRPr lang="en-US" dirty="0"/>
           </a:p>
@@ -3036,7 +2627,7 @@
             <a:fld id="{B61BEF0D-F0BB-DE4B-95CE-6DB70DBA9567}" type="datetimeFigureOut">
               <a:rPr lang="en-US" smtClean="0"/>
               <a:pPr/>
-              <a:t>8/17/26</a:t>
+              <a:t>8/24/26</a:t>
             </a:fld>
             <a:endParaRPr lang="en-US" dirty="0"/>
           </a:p>
@@ -3453,7 +3044,7 @@
             <a:fld id="{B61BEF0D-F0BB-DE4B-95CE-6DB70DBA9567}" type="datetimeFigureOut">
               <a:rPr lang="en-US" smtClean="0"/>
               <a:pPr/>
-              <a:t>8/17/26</a:t>
+              <a:t>8/24/26</a:t>
             </a:fld>
             <a:endParaRPr lang="en-US" dirty="0"/>
           </a:p>
@@ -3597,7 +3188,7 @@
             <a:fld id="{B61BEF0D-F0BB-DE4B-95CE-6DB70DBA9567}" type="datetimeFigureOut">
               <a:rPr lang="en-US" smtClean="0"/>
               <a:pPr/>
-              <a:t>8/17/26</a:t>
+              <a:t>8/24/26</a:t>
             </a:fld>
             <a:endParaRPr lang="en-US" dirty="0"/>
           </a:p>
@@ -3712,7 +3303,7 @@
             <a:fld id="{B61BEF0D-F0BB-DE4B-95CE-6DB70DBA9567}" type="datetimeFigureOut">
               <a:rPr lang="en-US" smtClean="0"/>
               <a:pPr/>
-              <a:t>8/17/26</a:t>
+              <a:t>8/24/26</a:t>
             </a:fld>
             <a:endParaRPr lang="en-US" dirty="0"/>
           </a:p>
@@ -4027,7 +3618,7 @@
             <a:fld id="{B61BEF0D-F0BB-DE4B-95CE-6DB70DBA9567}" type="datetimeFigureOut">
               <a:rPr lang="en-US" smtClean="0"/>
               <a:pPr/>
-              <a:t>8/17/26</a:t>
+              <a:t>8/24/26</a:t>
             </a:fld>
             <a:endParaRPr lang="en-US" dirty="0"/>
           </a:p>
@@ -4318,7 +3909,7 @@
             <a:fld id="{B61BEF0D-F0BB-DE4B-95CE-6DB70DBA9567}" type="datetimeFigureOut">
               <a:rPr lang="en-US" smtClean="0"/>
               <a:pPr/>
-              <a:t>8/17/26</a:t>
+              <a:t>8/24/26</a:t>
             </a:fld>
             <a:endParaRPr lang="en-US" dirty="0"/>
           </a:p>
@@ -4563,7 +4154,7 @@
             <a:fld id="{B61BEF0D-F0BB-DE4B-95CE-6DB70DBA9567}" type="datetimeFigureOut">
               <a:rPr lang="en-US" smtClean="0"/>
               <a:pPr/>
-              <a:t>8/17/26</a:t>
+              <a:t>8/24/26</a:t>
             </a:fld>
             <a:endParaRPr lang="en-US" dirty="0"/>
           </a:p>
@@ -5073,2501 +4664,6 @@
   <p:cSld>
     <p:spTree>
       <p:nvGrpSpPr>
-        <p:cNvPr id="1" name=""/>
-        <p:cNvGrpSpPr/>
-        <p:nvPr/>
-      </p:nvGrpSpPr>
-      <p:grpSpPr>
-        <a:xfrm>
-          <a:off x="0" y="0"/>
-          <a:ext cx="0" cy="0"/>
-          <a:chOff x="0" y="0"/>
-          <a:chExt cx="0" cy="0"/>
-        </a:xfrm>
-      </p:grpSpPr>
-      <p:sp>
-        <p:nvSpPr>
-          <p:cNvPr id="2" name="Title 1">
-            <a:extLst>
-              <a:ext uri="{FF2B5EF4-FFF2-40B4-BE49-F238E27FC236}">
-                <a16:creationId xmlns:a16="http://schemas.microsoft.com/office/drawing/2014/main" id="{F5523211-ABF9-267E-BA58-A45834ADA7DD}"/>
-              </a:ext>
-            </a:extLst>
-          </p:cNvPr>
-          <p:cNvSpPr>
-            <a:spLocks noGrp="1"/>
-          </p:cNvSpPr>
-          <p:nvPr>
-            <p:ph type="title"/>
-          </p:nvPr>
-        </p:nvSpPr>
-        <p:spPr/>
-        <p:txBody>
-          <a:bodyPr/>
-          <a:lstStyle/>
-          <a:p>
-            <a:r>
-              <a:rPr lang="en-US" b="1" dirty="0"/>
-              <a:t>Generalization and capacity</a:t>
-            </a:r>
-          </a:p>
-        </p:txBody>
-      </p:sp>
-      <p:pic>
-        <p:nvPicPr>
-          <p:cNvPr id="5" name="Content Placeholder 4">
-            <a:extLst>
-              <a:ext uri="{FF2B5EF4-FFF2-40B4-BE49-F238E27FC236}">
-                <a16:creationId xmlns:a16="http://schemas.microsoft.com/office/drawing/2014/main" id="{D57CB404-6572-E450-F2E6-F1374CAD482C}"/>
-              </a:ext>
-            </a:extLst>
-          </p:cNvPr>
-          <p:cNvPicPr>
-            <a:picLocks noGrp="1" noChangeAspect="1"/>
-          </p:cNvPicPr>
-          <p:nvPr>
-            <p:ph idx="1"/>
-          </p:nvPr>
-        </p:nvPicPr>
-        <p:blipFill>
-          <a:blip r:embed="rId3"/>
-          <a:stretch>
-            <a:fillRect/>
-          </a:stretch>
-        </p:blipFill>
-        <p:spPr>
-          <a:xfrm>
-            <a:off x="1938397" y="1788760"/>
-            <a:ext cx="8315205" cy="4005397"/>
-          </a:xfrm>
-          <a:prstGeom prst="rect">
-            <a:avLst/>
-          </a:prstGeom>
-        </p:spPr>
-      </p:pic>
-    </p:spTree>
-    <p:extLst>
-      <p:ext uri="{BB962C8B-B14F-4D97-AF65-F5344CB8AC3E}">
-        <p14:creationId xmlns:p14="http://schemas.microsoft.com/office/powerpoint/2010/main" val="2135879511"/>
-      </p:ext>
-    </p:extLst>
-  </p:cSld>
-  <p:clrMapOvr>
-    <a:masterClrMapping/>
-  </p:clrMapOvr>
-</p:sld>
-</file>
-
-<file path=ppt/slides/slide11.xml><?xml version="1.0" encoding="utf-8"?>
-<p:sld xmlns:a="http://schemas.openxmlformats.org/drawingml/2006/main" xmlns:r="http://schemas.openxmlformats.org/officeDocument/2006/relationships" xmlns:p="http://schemas.openxmlformats.org/presentationml/2006/main">
-  <p:cSld>
-    <p:spTree>
-      <p:nvGrpSpPr>
-        <p:cNvPr id="1" name=""/>
-        <p:cNvGrpSpPr/>
-        <p:nvPr/>
-      </p:nvGrpSpPr>
-      <p:grpSpPr>
-        <a:xfrm>
-          <a:off x="0" y="0"/>
-          <a:ext cx="0" cy="0"/>
-          <a:chOff x="0" y="0"/>
-          <a:chExt cx="0" cy="0"/>
-        </a:xfrm>
-      </p:grpSpPr>
-      <p:sp>
-        <p:nvSpPr>
-          <p:cNvPr id="2" name="Title 1">
-            <a:extLst>
-              <a:ext uri="{FF2B5EF4-FFF2-40B4-BE49-F238E27FC236}">
-                <a16:creationId xmlns:a16="http://schemas.microsoft.com/office/drawing/2014/main" id="{B02C2964-1D6D-0281-B280-E36B150AC187}"/>
-              </a:ext>
-            </a:extLst>
-          </p:cNvPr>
-          <p:cNvSpPr>
-            <a:spLocks noGrp="1"/>
-          </p:cNvSpPr>
-          <p:nvPr>
-            <p:ph type="title"/>
-          </p:nvPr>
-        </p:nvSpPr>
-        <p:spPr>
-          <a:xfrm>
-            <a:off x="838200" y="394940"/>
-            <a:ext cx="10515600" cy="1325563"/>
-          </a:xfrm>
-        </p:spPr>
-        <p:txBody>
-          <a:bodyPr/>
-          <a:lstStyle/>
-          <a:p>
-            <a:r>
-              <a:rPr lang="en-US" b="1" dirty="0">
-                <a:latin typeface="Cambria" pitchFamily="34" charset="0"/>
-                <a:ea typeface="Cambria" pitchFamily="34" charset="-122"/>
-                <a:cs typeface="Cambria" pitchFamily="34" charset="-120"/>
-              </a:rPr>
-              <a:t>Validation &amp; Cross-Validation</a:t>
-            </a:r>
-            <a:endParaRPr lang="en-US" dirty="0"/>
-          </a:p>
-        </p:txBody>
-      </p:sp>
-      <p:sp>
-        <p:nvSpPr>
-          <p:cNvPr id="6" name="Shape 3">
-            <a:extLst>
-              <a:ext uri="{FF2B5EF4-FFF2-40B4-BE49-F238E27FC236}">
-                <a16:creationId xmlns:a16="http://schemas.microsoft.com/office/drawing/2014/main" id="{A144C529-4B9A-3C4D-30F7-69EF9F65A3DE}"/>
-              </a:ext>
-            </a:extLst>
-          </p:cNvPr>
-          <p:cNvSpPr/>
-          <p:nvPr/>
-        </p:nvSpPr>
-        <p:spPr>
-          <a:xfrm>
-            <a:off x="534352" y="1657344"/>
-            <a:ext cx="4608576" cy="777240"/>
-          </a:xfrm>
-          <a:prstGeom prst="roundRect">
-            <a:avLst>
-              <a:gd name="adj" fmla="val 5882"/>
-            </a:avLst>
-          </a:prstGeom>
-          <a:solidFill>
-            <a:srgbClr val="0B3D62"/>
-          </a:solidFill>
-          <a:ln/>
-        </p:spPr>
-        <p:txBody>
-          <a:bodyPr/>
-          <a:lstStyle/>
-          <a:p>
-            <a:endParaRPr lang="en-US" dirty="0"/>
-          </a:p>
-        </p:txBody>
-      </p:sp>
-      <p:sp>
-        <p:nvSpPr>
-          <p:cNvPr id="7" name="Text 4">
-            <a:extLst>
-              <a:ext uri="{FF2B5EF4-FFF2-40B4-BE49-F238E27FC236}">
-                <a16:creationId xmlns:a16="http://schemas.microsoft.com/office/drawing/2014/main" id="{23B04B29-CEA6-0621-74A0-FA68DA38C2F0}"/>
-              </a:ext>
-            </a:extLst>
-          </p:cNvPr>
-          <p:cNvSpPr/>
-          <p:nvPr/>
-        </p:nvSpPr>
-        <p:spPr>
-          <a:xfrm>
-            <a:off x="534352" y="1657344"/>
-            <a:ext cx="4608576" cy="777240"/>
-          </a:xfrm>
-          <a:prstGeom prst="rect">
-            <a:avLst/>
-          </a:prstGeom>
-          <a:noFill/>
-          <a:ln/>
-        </p:spPr>
-        <p:txBody>
-          <a:bodyPr wrap="square" rtlCol="0" anchor="ctr"/>
-          <a:lstStyle/>
-          <a:p>
-            <a:pPr marL="0" indent="0" algn="ctr">
-              <a:buNone/>
-            </a:pPr>
-            <a:r>
-              <a:rPr lang="en-US" b="1" dirty="0">
-                <a:solidFill>
-                  <a:srgbClr val="FFFFFF"/>
-                </a:solidFill>
-                <a:latin typeface="Calibri" pitchFamily="34" charset="0"/>
-                <a:ea typeface="Calibri" pitchFamily="34" charset="-122"/>
-                <a:cs typeface="Calibri" pitchFamily="34" charset="-120"/>
-              </a:rPr>
-              <a:t>Training set (~80%)</a:t>
-            </a:r>
-            <a:endParaRPr lang="en-US" dirty="0"/>
-          </a:p>
-        </p:txBody>
-      </p:sp>
-      <p:sp>
-        <p:nvSpPr>
-          <p:cNvPr id="8" name="Shape 5">
-            <a:extLst>
-              <a:ext uri="{FF2B5EF4-FFF2-40B4-BE49-F238E27FC236}">
-                <a16:creationId xmlns:a16="http://schemas.microsoft.com/office/drawing/2014/main" id="{EFA7554F-E214-5685-586D-B9BB0DB8DDDD}"/>
-              </a:ext>
-            </a:extLst>
-          </p:cNvPr>
-          <p:cNvSpPr/>
-          <p:nvPr/>
-        </p:nvSpPr>
-        <p:spPr>
-          <a:xfrm>
-            <a:off x="5142928" y="1657344"/>
-            <a:ext cx="3072384" cy="777240"/>
-          </a:xfrm>
-          <a:prstGeom prst="roundRect">
-            <a:avLst>
-              <a:gd name="adj" fmla="val 5882"/>
-            </a:avLst>
-          </a:prstGeom>
-          <a:solidFill>
-            <a:srgbClr val="1C7293"/>
-          </a:solidFill>
-          <a:ln/>
-        </p:spPr>
-      </p:sp>
-      <p:sp>
-        <p:nvSpPr>
-          <p:cNvPr id="9" name="Text 6">
-            <a:extLst>
-              <a:ext uri="{FF2B5EF4-FFF2-40B4-BE49-F238E27FC236}">
-                <a16:creationId xmlns:a16="http://schemas.microsoft.com/office/drawing/2014/main" id="{A6A6B184-D253-4341-1C26-4266AD227454}"/>
-              </a:ext>
-            </a:extLst>
-          </p:cNvPr>
-          <p:cNvSpPr/>
-          <p:nvPr/>
-        </p:nvSpPr>
-        <p:spPr>
-          <a:xfrm>
-            <a:off x="5142928" y="1657344"/>
-            <a:ext cx="3072384" cy="777240"/>
-          </a:xfrm>
-          <a:prstGeom prst="rect">
-            <a:avLst/>
-          </a:prstGeom>
-          <a:noFill/>
-          <a:ln/>
-        </p:spPr>
-        <p:txBody>
-          <a:bodyPr wrap="square" rtlCol="0" anchor="ctr"/>
-          <a:lstStyle/>
-          <a:p>
-            <a:pPr marL="0" indent="0" algn="ctr">
-              <a:buNone/>
-            </a:pPr>
-            <a:r>
-              <a:rPr lang="en-US" b="1" dirty="0">
-                <a:solidFill>
-                  <a:srgbClr val="FFFFFF"/>
-                </a:solidFill>
-                <a:latin typeface="Calibri" pitchFamily="34" charset="0"/>
-                <a:ea typeface="Calibri" pitchFamily="34" charset="-122"/>
-                <a:cs typeface="Calibri" pitchFamily="34" charset="-120"/>
-              </a:rPr>
-              <a:t>Validation set (~20%)</a:t>
-            </a:r>
-            <a:endParaRPr lang="en-US" dirty="0"/>
-          </a:p>
-        </p:txBody>
-      </p:sp>
-      <p:sp>
-        <p:nvSpPr>
-          <p:cNvPr id="10" name="Shape 7">
-            <a:extLst>
-              <a:ext uri="{FF2B5EF4-FFF2-40B4-BE49-F238E27FC236}">
-                <a16:creationId xmlns:a16="http://schemas.microsoft.com/office/drawing/2014/main" id="{72E8A8D3-C011-0CC8-7A00-A049D681FDB4}"/>
-              </a:ext>
-            </a:extLst>
-          </p:cNvPr>
-          <p:cNvSpPr/>
-          <p:nvPr/>
-        </p:nvSpPr>
-        <p:spPr>
-          <a:xfrm>
-            <a:off x="8443912" y="1657344"/>
-            <a:ext cx="2286000" cy="777240"/>
-          </a:xfrm>
-          <a:prstGeom prst="roundRect">
-            <a:avLst>
-              <a:gd name="adj" fmla="val 5882"/>
-            </a:avLst>
-          </a:prstGeom>
-          <a:solidFill>
-            <a:srgbClr val="E8871E"/>
-          </a:solidFill>
-          <a:ln/>
-        </p:spPr>
-      </p:sp>
-      <p:sp>
-        <p:nvSpPr>
-          <p:cNvPr id="11" name="Text 8">
-            <a:extLst>
-              <a:ext uri="{FF2B5EF4-FFF2-40B4-BE49-F238E27FC236}">
-                <a16:creationId xmlns:a16="http://schemas.microsoft.com/office/drawing/2014/main" id="{57811463-0BBB-4147-BD3E-2528681379CB}"/>
-              </a:ext>
-            </a:extLst>
-          </p:cNvPr>
-          <p:cNvSpPr/>
-          <p:nvPr/>
-        </p:nvSpPr>
-        <p:spPr>
-          <a:xfrm>
-            <a:off x="8443912" y="1657344"/>
-            <a:ext cx="2286000" cy="777240"/>
-          </a:xfrm>
-          <a:prstGeom prst="rect">
-            <a:avLst/>
-          </a:prstGeom>
-          <a:noFill/>
-          <a:ln/>
-        </p:spPr>
-        <p:txBody>
-          <a:bodyPr wrap="square" rtlCol="0" anchor="ctr"/>
-          <a:lstStyle/>
-          <a:p>
-            <a:pPr marL="0" indent="0" algn="ctr">
-              <a:buNone/>
-            </a:pPr>
-            <a:r>
-              <a:rPr lang="en-US" b="1" dirty="0">
-                <a:solidFill>
-                  <a:srgbClr val="FFFFFF"/>
-                </a:solidFill>
-                <a:latin typeface="Calibri" pitchFamily="34" charset="0"/>
-                <a:ea typeface="Calibri" pitchFamily="34" charset="-122"/>
-                <a:cs typeface="Calibri" pitchFamily="34" charset="-120"/>
-              </a:rPr>
-              <a:t>Test set</a:t>
-            </a:r>
-            <a:endParaRPr lang="en-US" dirty="0"/>
-          </a:p>
-        </p:txBody>
-      </p:sp>
-      <p:sp>
-        <p:nvSpPr>
-          <p:cNvPr id="12" name="Text 9">
-            <a:extLst>
-              <a:ext uri="{FF2B5EF4-FFF2-40B4-BE49-F238E27FC236}">
-                <a16:creationId xmlns:a16="http://schemas.microsoft.com/office/drawing/2014/main" id="{23A8B6B4-BC77-BF73-8E6B-F6850FC3B69B}"/>
-              </a:ext>
-            </a:extLst>
-          </p:cNvPr>
-          <p:cNvSpPr/>
-          <p:nvPr/>
-        </p:nvSpPr>
-        <p:spPr>
-          <a:xfrm>
-            <a:off x="534352" y="2526024"/>
-            <a:ext cx="7680960" cy="320040"/>
-          </a:xfrm>
-          <a:prstGeom prst="rect">
-            <a:avLst/>
-          </a:prstGeom>
-          <a:noFill/>
-          <a:ln/>
-        </p:spPr>
-        <p:txBody>
-          <a:bodyPr wrap="square" rtlCol="0" anchor="ctr"/>
-          <a:lstStyle/>
-          <a:p>
-            <a:pPr marL="0" indent="0">
-              <a:buNone/>
-            </a:pPr>
-            <a:r>
-              <a:rPr lang="en-US" dirty="0">
-                <a:latin typeface="Calibri" pitchFamily="34" charset="0"/>
-                <a:ea typeface="Calibri" pitchFamily="34" charset="-122"/>
-                <a:cs typeface="Calibri" pitchFamily="34" charset="-120"/>
-              </a:rPr>
-              <a:t>Held out from the original “training data” pool</a:t>
-            </a:r>
-            <a:endParaRPr lang="en-US" dirty="0"/>
-          </a:p>
-        </p:txBody>
-      </p:sp>
-      <p:sp>
-        <p:nvSpPr>
-          <p:cNvPr id="13" name="Text 10">
-            <a:extLst>
-              <a:ext uri="{FF2B5EF4-FFF2-40B4-BE49-F238E27FC236}">
-                <a16:creationId xmlns:a16="http://schemas.microsoft.com/office/drawing/2014/main" id="{B7636234-3011-7529-C233-D9B1329BA45B}"/>
-              </a:ext>
-            </a:extLst>
-          </p:cNvPr>
-          <p:cNvSpPr/>
-          <p:nvPr/>
-        </p:nvSpPr>
-        <p:spPr>
-          <a:xfrm>
-            <a:off x="8443912" y="3368998"/>
-            <a:ext cx="2286000" cy="457200"/>
-          </a:xfrm>
-          <a:prstGeom prst="rect">
-            <a:avLst/>
-          </a:prstGeom>
-          <a:noFill/>
-          <a:ln/>
-        </p:spPr>
-        <p:txBody>
-          <a:bodyPr wrap="square" rtlCol="0" anchor="ctr"/>
-          <a:lstStyle/>
-          <a:p>
-            <a:pPr marL="0" indent="0">
-              <a:buNone/>
-            </a:pPr>
-            <a:r>
-              <a:rPr lang="en-US" sz="1100" dirty="0">
-                <a:solidFill>
-                  <a:srgbClr val="5B6B7A"/>
-                </a:solidFill>
-                <a:latin typeface="Calibri" pitchFamily="34" charset="0"/>
-                <a:ea typeface="Calibri" pitchFamily="34" charset="-122"/>
-                <a:cs typeface="Calibri" pitchFamily="34" charset="-120"/>
-              </a:rPr>
-              <a:t>Never touched until the very end</a:t>
-            </a:r>
-            <a:endParaRPr lang="en-US" sz="1100" dirty="0"/>
-          </a:p>
-        </p:txBody>
-      </p:sp>
-      <p:sp>
-        <p:nvSpPr>
-          <p:cNvPr id="14" name="Text 11">
-            <a:extLst>
-              <a:ext uri="{FF2B5EF4-FFF2-40B4-BE49-F238E27FC236}">
-                <a16:creationId xmlns:a16="http://schemas.microsoft.com/office/drawing/2014/main" id="{D6F442FC-C26A-3452-07CA-7DFB8BF31E27}"/>
-              </a:ext>
-            </a:extLst>
-          </p:cNvPr>
-          <p:cNvSpPr/>
-          <p:nvPr/>
-        </p:nvSpPr>
-        <p:spPr>
-          <a:xfrm>
-            <a:off x="534352" y="3291840"/>
-            <a:ext cx="7680960" cy="2194560"/>
-          </a:xfrm>
-          <a:prstGeom prst="rect">
-            <a:avLst/>
-          </a:prstGeom>
-          <a:noFill/>
-          <a:ln/>
-        </p:spPr>
-        <p:txBody>
-          <a:bodyPr wrap="square" rtlCol="0" anchor="t"/>
-          <a:lstStyle/>
-          <a:p>
-            <a:pPr marL="228600" indent="-228600">
-              <a:lnSpc>
-                <a:spcPct val="115000"/>
-              </a:lnSpc>
-              <a:spcAft>
-                <a:spcPts val="1200"/>
-              </a:spcAft>
-              <a:buSzPct val="100000"/>
-              <a:buChar char="•"/>
-            </a:pPr>
-            <a:r>
-              <a:rPr lang="en-US" sz="2000" b="1" dirty="0">
-                <a:solidFill>
-                  <a:srgbClr val="1B2733"/>
-                </a:solidFill>
-                <a:latin typeface="Calibri" pitchFamily="34" charset="0"/>
-                <a:ea typeface="Calibri" pitchFamily="34" charset="-122"/>
-                <a:cs typeface="Calibri" pitchFamily="34" charset="-120"/>
-              </a:rPr>
-              <a:t>Validation set</a:t>
-            </a:r>
-            <a:r>
-              <a:rPr lang="en-US" sz="2000" dirty="0">
-                <a:solidFill>
-                  <a:srgbClr val="1B2733"/>
-                </a:solidFill>
-                <a:latin typeface="Calibri" pitchFamily="34" charset="0"/>
-                <a:ea typeface="Calibri" pitchFamily="34" charset="-122"/>
-                <a:cs typeface="Calibri" pitchFamily="34" charset="-120"/>
-              </a:rPr>
-              <a:t>: used to select hyperparameters — its error slightly underestimates true generalization error</a:t>
-            </a:r>
-            <a:endParaRPr lang="en-US" sz="2000" dirty="0"/>
-          </a:p>
-          <a:p>
-            <a:pPr marL="228600" indent="-228600">
-              <a:lnSpc>
-                <a:spcPct val="115000"/>
-              </a:lnSpc>
-              <a:spcAft>
-                <a:spcPts val="1200"/>
-              </a:spcAft>
-              <a:buSzPct val="100000"/>
-              <a:buChar char="•"/>
-            </a:pPr>
-            <a:r>
-              <a:rPr lang="en-US" sz="2000" dirty="0">
-                <a:solidFill>
-                  <a:srgbClr val="1B2733"/>
-                </a:solidFill>
-                <a:latin typeface="Calibri" pitchFamily="34" charset="0"/>
-                <a:ea typeface="Calibri" pitchFamily="34" charset="-122"/>
-                <a:cs typeface="Calibri" pitchFamily="34" charset="-120"/>
-              </a:rPr>
-              <a:t>T</a:t>
-            </a:r>
-            <a:r>
-              <a:rPr lang="en-US" sz="2000" b="1" dirty="0">
-                <a:solidFill>
-                  <a:srgbClr val="1B2733"/>
-                </a:solidFill>
-                <a:latin typeface="Calibri" pitchFamily="34" charset="0"/>
-                <a:ea typeface="Calibri" pitchFamily="34" charset="-122"/>
-                <a:cs typeface="Calibri" pitchFamily="34" charset="-120"/>
-              </a:rPr>
-              <a:t>est set</a:t>
-            </a:r>
-            <a:r>
-              <a:rPr lang="en-US" sz="2000" dirty="0">
-                <a:solidFill>
-                  <a:srgbClr val="1B2733"/>
-                </a:solidFill>
-                <a:latin typeface="Calibri" pitchFamily="34" charset="0"/>
-                <a:ea typeface="Calibri" pitchFamily="34" charset="-122"/>
-                <a:cs typeface="Calibri" pitchFamily="34" charset="-120"/>
-              </a:rPr>
-              <a:t>: touched exactly once, after all tuning, to report final generalization error</a:t>
-            </a:r>
-            <a:endParaRPr lang="en-US" sz="2000" dirty="0"/>
-          </a:p>
-        </p:txBody>
-      </p:sp>
-      <p:sp>
-        <p:nvSpPr>
-          <p:cNvPr id="15" name="Shape 12">
-            <a:extLst>
-              <a:ext uri="{FF2B5EF4-FFF2-40B4-BE49-F238E27FC236}">
-                <a16:creationId xmlns:a16="http://schemas.microsoft.com/office/drawing/2014/main" id="{ECC728DA-7723-83DF-F85C-48493A2FB024}"/>
-              </a:ext>
-            </a:extLst>
-          </p:cNvPr>
-          <p:cNvSpPr/>
-          <p:nvPr/>
-        </p:nvSpPr>
-        <p:spPr>
-          <a:xfrm>
-            <a:off x="8386761" y="3052384"/>
-            <a:ext cx="3063240" cy="3657600"/>
-          </a:xfrm>
-          <a:prstGeom prst="roundRect">
-            <a:avLst>
-              <a:gd name="adj" fmla="val 2687"/>
-            </a:avLst>
-          </a:prstGeom>
-          <a:solidFill>
-            <a:srgbClr val="F4F7FA"/>
-          </a:solidFill>
-          <a:ln w="12700">
-            <a:solidFill>
-              <a:srgbClr val="F4F7FA"/>
-            </a:solidFill>
-            <a:prstDash val="solid"/>
-          </a:ln>
-          <a:effectLst>
-            <a:outerShdw blurRad="76200" dist="25400" dir="5400000" algn="bl" rotWithShape="0">
-              <a:srgbClr val="000000">
-                <a:alpha val="8000"/>
-              </a:srgbClr>
-            </a:outerShdw>
-          </a:effectLst>
-        </p:spPr>
-      </p:sp>
-      <p:sp>
-        <p:nvSpPr>
-          <p:cNvPr id="16" name="Text 13">
-            <a:extLst>
-              <a:ext uri="{FF2B5EF4-FFF2-40B4-BE49-F238E27FC236}">
-                <a16:creationId xmlns:a16="http://schemas.microsoft.com/office/drawing/2014/main" id="{30F5D427-4252-0EA2-9686-5E19E3CBAF50}"/>
-              </a:ext>
-            </a:extLst>
-          </p:cNvPr>
-          <p:cNvSpPr/>
-          <p:nvPr/>
-        </p:nvSpPr>
-        <p:spPr>
-          <a:xfrm>
-            <a:off x="8386760" y="2678049"/>
-            <a:ext cx="3028951" cy="457200"/>
-          </a:xfrm>
-          <a:prstGeom prst="rect">
-            <a:avLst/>
-          </a:prstGeom>
-          <a:noFill/>
-          <a:ln/>
-        </p:spPr>
-        <p:txBody>
-          <a:bodyPr wrap="square" rtlCol="0" anchor="ctr"/>
-          <a:lstStyle/>
-          <a:p>
-            <a:pPr marL="0" indent="0" algn="ctr">
-              <a:buNone/>
-            </a:pPr>
-            <a:r>
-              <a:rPr lang="en-US" sz="1400" b="1" dirty="0">
-                <a:latin typeface="Cambria" pitchFamily="34" charset="0"/>
-                <a:ea typeface="Cambria" pitchFamily="34" charset="-122"/>
-                <a:cs typeface="Cambria" pitchFamily="34" charset="-120"/>
-              </a:rPr>
-              <a:t>k-Fold Cross-Validation</a:t>
-            </a:r>
-            <a:endParaRPr lang="en-US" sz="1400" dirty="0"/>
-          </a:p>
-        </p:txBody>
-      </p:sp>
-      <p:sp>
-        <p:nvSpPr>
-          <p:cNvPr id="17" name="Shape 14">
-            <a:extLst>
-              <a:ext uri="{FF2B5EF4-FFF2-40B4-BE49-F238E27FC236}">
-                <a16:creationId xmlns:a16="http://schemas.microsoft.com/office/drawing/2014/main" id="{6E01A99E-6AFB-A971-DA32-61B513F1977A}"/>
-              </a:ext>
-            </a:extLst>
-          </p:cNvPr>
-          <p:cNvSpPr/>
-          <p:nvPr/>
-        </p:nvSpPr>
-        <p:spPr>
-          <a:xfrm>
-            <a:off x="8763952" y="3186118"/>
-            <a:ext cx="420624" cy="420624"/>
-          </a:xfrm>
-          <a:prstGeom prst="rect">
-            <a:avLst/>
-          </a:prstGeom>
-          <a:solidFill>
-            <a:srgbClr val="E8871E"/>
-          </a:solidFill>
-          <a:ln w="12700">
-            <a:solidFill>
-              <a:srgbClr val="FFFFFF"/>
-            </a:solidFill>
-            <a:prstDash val="solid"/>
-          </a:ln>
-        </p:spPr>
-      </p:sp>
-      <p:sp>
-        <p:nvSpPr>
-          <p:cNvPr id="18" name="Shape 15">
-            <a:extLst>
-              <a:ext uri="{FF2B5EF4-FFF2-40B4-BE49-F238E27FC236}">
-                <a16:creationId xmlns:a16="http://schemas.microsoft.com/office/drawing/2014/main" id="{53FA7E0E-A1BC-1E33-284C-5EF0C6980597}"/>
-              </a:ext>
-            </a:extLst>
-          </p:cNvPr>
-          <p:cNvSpPr/>
-          <p:nvPr/>
-        </p:nvSpPr>
-        <p:spPr>
-          <a:xfrm>
-            <a:off x="9221152" y="3186118"/>
-            <a:ext cx="420624" cy="420624"/>
-          </a:xfrm>
-          <a:prstGeom prst="rect">
-            <a:avLst/>
-          </a:prstGeom>
-          <a:solidFill>
-            <a:srgbClr val="1C7293">
-              <a:alpha val="45000"/>
-            </a:srgbClr>
-          </a:solidFill>
-          <a:ln w="12700">
-            <a:solidFill>
-              <a:srgbClr val="FFFFFF"/>
-            </a:solidFill>
-            <a:prstDash val="solid"/>
-          </a:ln>
-        </p:spPr>
-      </p:sp>
-      <p:sp>
-        <p:nvSpPr>
-          <p:cNvPr id="19" name="Shape 16">
-            <a:extLst>
-              <a:ext uri="{FF2B5EF4-FFF2-40B4-BE49-F238E27FC236}">
-                <a16:creationId xmlns:a16="http://schemas.microsoft.com/office/drawing/2014/main" id="{FC5F1E93-5B45-7468-233A-467B7A1FB32B}"/>
-              </a:ext>
-            </a:extLst>
-          </p:cNvPr>
-          <p:cNvSpPr/>
-          <p:nvPr/>
-        </p:nvSpPr>
-        <p:spPr>
-          <a:xfrm>
-            <a:off x="9678352" y="3186118"/>
-            <a:ext cx="420624" cy="420624"/>
-          </a:xfrm>
-          <a:prstGeom prst="rect">
-            <a:avLst/>
-          </a:prstGeom>
-          <a:solidFill>
-            <a:srgbClr val="1C7293">
-              <a:alpha val="45000"/>
-            </a:srgbClr>
-          </a:solidFill>
-          <a:ln w="12700">
-            <a:solidFill>
-              <a:srgbClr val="FFFFFF"/>
-            </a:solidFill>
-            <a:prstDash val="solid"/>
-          </a:ln>
-        </p:spPr>
-      </p:sp>
-      <p:sp>
-        <p:nvSpPr>
-          <p:cNvPr id="20" name="Shape 17">
-            <a:extLst>
-              <a:ext uri="{FF2B5EF4-FFF2-40B4-BE49-F238E27FC236}">
-                <a16:creationId xmlns:a16="http://schemas.microsoft.com/office/drawing/2014/main" id="{C14EBA8A-9218-8B95-6147-075E850F7440}"/>
-              </a:ext>
-            </a:extLst>
-          </p:cNvPr>
-          <p:cNvSpPr/>
-          <p:nvPr/>
-        </p:nvSpPr>
-        <p:spPr>
-          <a:xfrm>
-            <a:off x="10135552" y="3186118"/>
-            <a:ext cx="420624" cy="420624"/>
-          </a:xfrm>
-          <a:prstGeom prst="rect">
-            <a:avLst/>
-          </a:prstGeom>
-          <a:solidFill>
-            <a:srgbClr val="1C7293">
-              <a:alpha val="45000"/>
-            </a:srgbClr>
-          </a:solidFill>
-          <a:ln w="12700">
-            <a:solidFill>
-              <a:srgbClr val="FFFFFF"/>
-            </a:solidFill>
-            <a:prstDash val="solid"/>
-          </a:ln>
-        </p:spPr>
-      </p:sp>
-      <p:sp>
-        <p:nvSpPr>
-          <p:cNvPr id="21" name="Shape 18">
-            <a:extLst>
-              <a:ext uri="{FF2B5EF4-FFF2-40B4-BE49-F238E27FC236}">
-                <a16:creationId xmlns:a16="http://schemas.microsoft.com/office/drawing/2014/main" id="{831A963F-C9E1-5956-CC0C-F820A4BEC3AC}"/>
-              </a:ext>
-            </a:extLst>
-          </p:cNvPr>
-          <p:cNvSpPr/>
-          <p:nvPr/>
-        </p:nvSpPr>
-        <p:spPr>
-          <a:xfrm>
-            <a:off x="10592752" y="3186118"/>
-            <a:ext cx="420624" cy="420624"/>
-          </a:xfrm>
-          <a:prstGeom prst="rect">
-            <a:avLst/>
-          </a:prstGeom>
-          <a:solidFill>
-            <a:srgbClr val="1C7293">
-              <a:alpha val="45000"/>
-            </a:srgbClr>
-          </a:solidFill>
-          <a:ln w="12700">
-            <a:solidFill>
-              <a:srgbClr val="FFFFFF"/>
-            </a:solidFill>
-            <a:prstDash val="solid"/>
-          </a:ln>
-        </p:spPr>
-      </p:sp>
-      <p:sp>
-        <p:nvSpPr>
-          <p:cNvPr id="22" name="Shape 19">
-            <a:extLst>
-              <a:ext uri="{FF2B5EF4-FFF2-40B4-BE49-F238E27FC236}">
-                <a16:creationId xmlns:a16="http://schemas.microsoft.com/office/drawing/2014/main" id="{47E92177-6331-D8C3-3FA0-9CA5A377F02A}"/>
-              </a:ext>
-            </a:extLst>
-          </p:cNvPr>
-          <p:cNvSpPr/>
-          <p:nvPr/>
-        </p:nvSpPr>
-        <p:spPr>
-          <a:xfrm>
-            <a:off x="8763952" y="3753046"/>
-            <a:ext cx="420624" cy="420624"/>
-          </a:xfrm>
-          <a:prstGeom prst="rect">
-            <a:avLst/>
-          </a:prstGeom>
-          <a:solidFill>
-            <a:srgbClr val="1C7293">
-              <a:alpha val="45000"/>
-            </a:srgbClr>
-          </a:solidFill>
-          <a:ln w="12700">
-            <a:solidFill>
-              <a:srgbClr val="FFFFFF"/>
-            </a:solidFill>
-            <a:prstDash val="solid"/>
-          </a:ln>
-        </p:spPr>
-      </p:sp>
-      <p:sp>
-        <p:nvSpPr>
-          <p:cNvPr id="23" name="Shape 20">
-            <a:extLst>
-              <a:ext uri="{FF2B5EF4-FFF2-40B4-BE49-F238E27FC236}">
-                <a16:creationId xmlns:a16="http://schemas.microsoft.com/office/drawing/2014/main" id="{98D556E6-D2ED-1802-4132-F4AB6E3C332A}"/>
-              </a:ext>
-            </a:extLst>
-          </p:cNvPr>
-          <p:cNvSpPr/>
-          <p:nvPr/>
-        </p:nvSpPr>
-        <p:spPr>
-          <a:xfrm>
-            <a:off x="9221152" y="3753046"/>
-            <a:ext cx="420624" cy="420624"/>
-          </a:xfrm>
-          <a:prstGeom prst="rect">
-            <a:avLst/>
-          </a:prstGeom>
-          <a:solidFill>
-            <a:srgbClr val="E8871E"/>
-          </a:solidFill>
-          <a:ln w="12700">
-            <a:solidFill>
-              <a:srgbClr val="FFFFFF"/>
-            </a:solidFill>
-            <a:prstDash val="solid"/>
-          </a:ln>
-        </p:spPr>
-      </p:sp>
-      <p:sp>
-        <p:nvSpPr>
-          <p:cNvPr id="24" name="Shape 21">
-            <a:extLst>
-              <a:ext uri="{FF2B5EF4-FFF2-40B4-BE49-F238E27FC236}">
-                <a16:creationId xmlns:a16="http://schemas.microsoft.com/office/drawing/2014/main" id="{A1C8B907-BC21-4E18-D6C5-87A1B3F4528E}"/>
-              </a:ext>
-            </a:extLst>
-          </p:cNvPr>
-          <p:cNvSpPr/>
-          <p:nvPr/>
-        </p:nvSpPr>
-        <p:spPr>
-          <a:xfrm>
-            <a:off x="9678352" y="3753046"/>
-            <a:ext cx="420624" cy="420624"/>
-          </a:xfrm>
-          <a:prstGeom prst="rect">
-            <a:avLst/>
-          </a:prstGeom>
-          <a:solidFill>
-            <a:srgbClr val="1C7293">
-              <a:alpha val="45000"/>
-            </a:srgbClr>
-          </a:solidFill>
-          <a:ln w="12700">
-            <a:solidFill>
-              <a:srgbClr val="FFFFFF"/>
-            </a:solidFill>
-            <a:prstDash val="solid"/>
-          </a:ln>
-        </p:spPr>
-      </p:sp>
-      <p:sp>
-        <p:nvSpPr>
-          <p:cNvPr id="25" name="Shape 22">
-            <a:extLst>
-              <a:ext uri="{FF2B5EF4-FFF2-40B4-BE49-F238E27FC236}">
-                <a16:creationId xmlns:a16="http://schemas.microsoft.com/office/drawing/2014/main" id="{535467A7-A3C1-FCDB-41D4-FD1715EAA3BE}"/>
-              </a:ext>
-            </a:extLst>
-          </p:cNvPr>
-          <p:cNvSpPr/>
-          <p:nvPr/>
-        </p:nvSpPr>
-        <p:spPr>
-          <a:xfrm>
-            <a:off x="10135552" y="3753046"/>
-            <a:ext cx="420624" cy="420624"/>
-          </a:xfrm>
-          <a:prstGeom prst="rect">
-            <a:avLst/>
-          </a:prstGeom>
-          <a:solidFill>
-            <a:srgbClr val="1C7293">
-              <a:alpha val="45000"/>
-            </a:srgbClr>
-          </a:solidFill>
-          <a:ln w="12700">
-            <a:solidFill>
-              <a:srgbClr val="FFFFFF"/>
-            </a:solidFill>
-            <a:prstDash val="solid"/>
-          </a:ln>
-        </p:spPr>
-      </p:sp>
-      <p:sp>
-        <p:nvSpPr>
-          <p:cNvPr id="26" name="Shape 23">
-            <a:extLst>
-              <a:ext uri="{FF2B5EF4-FFF2-40B4-BE49-F238E27FC236}">
-                <a16:creationId xmlns:a16="http://schemas.microsoft.com/office/drawing/2014/main" id="{6FB98D82-5402-B025-E0FD-906BD9999163}"/>
-              </a:ext>
-            </a:extLst>
-          </p:cNvPr>
-          <p:cNvSpPr/>
-          <p:nvPr/>
-        </p:nvSpPr>
-        <p:spPr>
-          <a:xfrm>
-            <a:off x="10592752" y="3753046"/>
-            <a:ext cx="420624" cy="420624"/>
-          </a:xfrm>
-          <a:prstGeom prst="rect">
-            <a:avLst/>
-          </a:prstGeom>
-          <a:solidFill>
-            <a:srgbClr val="1C7293">
-              <a:alpha val="45000"/>
-            </a:srgbClr>
-          </a:solidFill>
-          <a:ln w="12700">
-            <a:solidFill>
-              <a:srgbClr val="FFFFFF"/>
-            </a:solidFill>
-            <a:prstDash val="solid"/>
-          </a:ln>
-        </p:spPr>
-      </p:sp>
-      <p:sp>
-        <p:nvSpPr>
-          <p:cNvPr id="27" name="Shape 24">
-            <a:extLst>
-              <a:ext uri="{FF2B5EF4-FFF2-40B4-BE49-F238E27FC236}">
-                <a16:creationId xmlns:a16="http://schemas.microsoft.com/office/drawing/2014/main" id="{8F0D7CE1-F562-A4BF-60AD-D618889D452D}"/>
-              </a:ext>
-            </a:extLst>
-          </p:cNvPr>
-          <p:cNvSpPr/>
-          <p:nvPr/>
-        </p:nvSpPr>
-        <p:spPr>
-          <a:xfrm>
-            <a:off x="8763952" y="4319974"/>
-            <a:ext cx="420624" cy="420624"/>
-          </a:xfrm>
-          <a:prstGeom prst="rect">
-            <a:avLst/>
-          </a:prstGeom>
-          <a:solidFill>
-            <a:srgbClr val="1C7293">
-              <a:alpha val="45000"/>
-            </a:srgbClr>
-          </a:solidFill>
-          <a:ln w="12700">
-            <a:solidFill>
-              <a:srgbClr val="FFFFFF"/>
-            </a:solidFill>
-            <a:prstDash val="solid"/>
-          </a:ln>
-        </p:spPr>
-      </p:sp>
-      <p:sp>
-        <p:nvSpPr>
-          <p:cNvPr id="28" name="Shape 25">
-            <a:extLst>
-              <a:ext uri="{FF2B5EF4-FFF2-40B4-BE49-F238E27FC236}">
-                <a16:creationId xmlns:a16="http://schemas.microsoft.com/office/drawing/2014/main" id="{298DF1D9-E133-71AF-BE42-BFA580C82B72}"/>
-              </a:ext>
-            </a:extLst>
-          </p:cNvPr>
-          <p:cNvSpPr/>
-          <p:nvPr/>
-        </p:nvSpPr>
-        <p:spPr>
-          <a:xfrm>
-            <a:off x="9221152" y="4319974"/>
-            <a:ext cx="420624" cy="420624"/>
-          </a:xfrm>
-          <a:prstGeom prst="rect">
-            <a:avLst/>
-          </a:prstGeom>
-          <a:solidFill>
-            <a:srgbClr val="1C7293">
-              <a:alpha val="45000"/>
-            </a:srgbClr>
-          </a:solidFill>
-          <a:ln w="12700">
-            <a:solidFill>
-              <a:srgbClr val="FFFFFF"/>
-            </a:solidFill>
-            <a:prstDash val="solid"/>
-          </a:ln>
-        </p:spPr>
-      </p:sp>
-      <p:sp>
-        <p:nvSpPr>
-          <p:cNvPr id="29" name="Shape 26">
-            <a:extLst>
-              <a:ext uri="{FF2B5EF4-FFF2-40B4-BE49-F238E27FC236}">
-                <a16:creationId xmlns:a16="http://schemas.microsoft.com/office/drawing/2014/main" id="{A2128A1F-B8FE-E304-3B41-31CF275C6C33}"/>
-              </a:ext>
-            </a:extLst>
-          </p:cNvPr>
-          <p:cNvSpPr/>
-          <p:nvPr/>
-        </p:nvSpPr>
-        <p:spPr>
-          <a:xfrm>
-            <a:off x="9678352" y="4319974"/>
-            <a:ext cx="420624" cy="420624"/>
-          </a:xfrm>
-          <a:prstGeom prst="rect">
-            <a:avLst/>
-          </a:prstGeom>
-          <a:solidFill>
-            <a:srgbClr val="E8871E"/>
-          </a:solidFill>
-          <a:ln w="12700">
-            <a:solidFill>
-              <a:srgbClr val="FFFFFF"/>
-            </a:solidFill>
-            <a:prstDash val="solid"/>
-          </a:ln>
-        </p:spPr>
-      </p:sp>
-      <p:sp>
-        <p:nvSpPr>
-          <p:cNvPr id="30" name="Shape 27">
-            <a:extLst>
-              <a:ext uri="{FF2B5EF4-FFF2-40B4-BE49-F238E27FC236}">
-                <a16:creationId xmlns:a16="http://schemas.microsoft.com/office/drawing/2014/main" id="{C8F9123C-884D-32A8-FBF5-BC26AA6DB02C}"/>
-              </a:ext>
-            </a:extLst>
-          </p:cNvPr>
-          <p:cNvSpPr/>
-          <p:nvPr/>
-        </p:nvSpPr>
-        <p:spPr>
-          <a:xfrm>
-            <a:off x="10135552" y="4319974"/>
-            <a:ext cx="420624" cy="420624"/>
-          </a:xfrm>
-          <a:prstGeom prst="rect">
-            <a:avLst/>
-          </a:prstGeom>
-          <a:solidFill>
-            <a:srgbClr val="1C7293">
-              <a:alpha val="45000"/>
-            </a:srgbClr>
-          </a:solidFill>
-          <a:ln w="12700">
-            <a:solidFill>
-              <a:srgbClr val="FFFFFF"/>
-            </a:solidFill>
-            <a:prstDash val="solid"/>
-          </a:ln>
-        </p:spPr>
-      </p:sp>
-      <p:sp>
-        <p:nvSpPr>
-          <p:cNvPr id="31" name="Shape 28">
-            <a:extLst>
-              <a:ext uri="{FF2B5EF4-FFF2-40B4-BE49-F238E27FC236}">
-                <a16:creationId xmlns:a16="http://schemas.microsoft.com/office/drawing/2014/main" id="{C3540D2E-E484-7DCF-86C9-C28679359EA8}"/>
-              </a:ext>
-            </a:extLst>
-          </p:cNvPr>
-          <p:cNvSpPr/>
-          <p:nvPr/>
-        </p:nvSpPr>
-        <p:spPr>
-          <a:xfrm>
-            <a:off x="10592752" y="4319974"/>
-            <a:ext cx="420624" cy="420624"/>
-          </a:xfrm>
-          <a:prstGeom prst="rect">
-            <a:avLst/>
-          </a:prstGeom>
-          <a:solidFill>
-            <a:srgbClr val="1C7293">
-              <a:alpha val="45000"/>
-            </a:srgbClr>
-          </a:solidFill>
-          <a:ln w="12700">
-            <a:solidFill>
-              <a:srgbClr val="FFFFFF"/>
-            </a:solidFill>
-            <a:prstDash val="solid"/>
-          </a:ln>
-        </p:spPr>
-      </p:sp>
-      <p:sp>
-        <p:nvSpPr>
-          <p:cNvPr id="32" name="Shape 29">
-            <a:extLst>
-              <a:ext uri="{FF2B5EF4-FFF2-40B4-BE49-F238E27FC236}">
-                <a16:creationId xmlns:a16="http://schemas.microsoft.com/office/drawing/2014/main" id="{454C6C26-B163-52DD-4B03-C289030D789E}"/>
-              </a:ext>
-            </a:extLst>
-          </p:cNvPr>
-          <p:cNvSpPr/>
-          <p:nvPr/>
-        </p:nvSpPr>
-        <p:spPr>
-          <a:xfrm>
-            <a:off x="8763952" y="4886902"/>
-            <a:ext cx="420624" cy="420624"/>
-          </a:xfrm>
-          <a:prstGeom prst="rect">
-            <a:avLst/>
-          </a:prstGeom>
-          <a:solidFill>
-            <a:srgbClr val="1C7293">
-              <a:alpha val="45000"/>
-            </a:srgbClr>
-          </a:solidFill>
-          <a:ln w="12700">
-            <a:solidFill>
-              <a:srgbClr val="FFFFFF"/>
-            </a:solidFill>
-            <a:prstDash val="solid"/>
-          </a:ln>
-        </p:spPr>
-      </p:sp>
-      <p:sp>
-        <p:nvSpPr>
-          <p:cNvPr id="33" name="Shape 30">
-            <a:extLst>
-              <a:ext uri="{FF2B5EF4-FFF2-40B4-BE49-F238E27FC236}">
-                <a16:creationId xmlns:a16="http://schemas.microsoft.com/office/drawing/2014/main" id="{5C719AF1-2BAC-B039-9E07-515A1D99600D}"/>
-              </a:ext>
-            </a:extLst>
-          </p:cNvPr>
-          <p:cNvSpPr/>
-          <p:nvPr/>
-        </p:nvSpPr>
-        <p:spPr>
-          <a:xfrm>
-            <a:off x="9221152" y="4886902"/>
-            <a:ext cx="420624" cy="420624"/>
-          </a:xfrm>
-          <a:prstGeom prst="rect">
-            <a:avLst/>
-          </a:prstGeom>
-          <a:solidFill>
-            <a:srgbClr val="1C7293">
-              <a:alpha val="45000"/>
-            </a:srgbClr>
-          </a:solidFill>
-          <a:ln w="12700">
-            <a:solidFill>
-              <a:srgbClr val="FFFFFF"/>
-            </a:solidFill>
-            <a:prstDash val="solid"/>
-          </a:ln>
-        </p:spPr>
-      </p:sp>
-      <p:sp>
-        <p:nvSpPr>
-          <p:cNvPr id="34" name="Shape 31">
-            <a:extLst>
-              <a:ext uri="{FF2B5EF4-FFF2-40B4-BE49-F238E27FC236}">
-                <a16:creationId xmlns:a16="http://schemas.microsoft.com/office/drawing/2014/main" id="{CB528783-5B97-7044-FD9E-127A42C88DF5}"/>
-              </a:ext>
-            </a:extLst>
-          </p:cNvPr>
-          <p:cNvSpPr/>
-          <p:nvPr/>
-        </p:nvSpPr>
-        <p:spPr>
-          <a:xfrm>
-            <a:off x="9678352" y="4886902"/>
-            <a:ext cx="420624" cy="420624"/>
-          </a:xfrm>
-          <a:prstGeom prst="rect">
-            <a:avLst/>
-          </a:prstGeom>
-          <a:solidFill>
-            <a:srgbClr val="1C7293">
-              <a:alpha val="45000"/>
-            </a:srgbClr>
-          </a:solidFill>
-          <a:ln w="12700">
-            <a:solidFill>
-              <a:srgbClr val="FFFFFF"/>
-            </a:solidFill>
-            <a:prstDash val="solid"/>
-          </a:ln>
-        </p:spPr>
-      </p:sp>
-      <p:sp>
-        <p:nvSpPr>
-          <p:cNvPr id="35" name="Shape 32">
-            <a:extLst>
-              <a:ext uri="{FF2B5EF4-FFF2-40B4-BE49-F238E27FC236}">
-                <a16:creationId xmlns:a16="http://schemas.microsoft.com/office/drawing/2014/main" id="{27C672BF-A906-9D4C-B3F0-9A3FE323D1F9}"/>
-              </a:ext>
-            </a:extLst>
-          </p:cNvPr>
-          <p:cNvSpPr/>
-          <p:nvPr/>
-        </p:nvSpPr>
-        <p:spPr>
-          <a:xfrm>
-            <a:off x="10135552" y="4886902"/>
-            <a:ext cx="420624" cy="420624"/>
-          </a:xfrm>
-          <a:prstGeom prst="rect">
-            <a:avLst/>
-          </a:prstGeom>
-          <a:solidFill>
-            <a:srgbClr val="E8871E"/>
-          </a:solidFill>
-          <a:ln w="12700">
-            <a:solidFill>
-              <a:srgbClr val="FFFFFF"/>
-            </a:solidFill>
-            <a:prstDash val="solid"/>
-          </a:ln>
-        </p:spPr>
-      </p:sp>
-      <p:sp>
-        <p:nvSpPr>
-          <p:cNvPr id="36" name="Shape 33">
-            <a:extLst>
-              <a:ext uri="{FF2B5EF4-FFF2-40B4-BE49-F238E27FC236}">
-                <a16:creationId xmlns:a16="http://schemas.microsoft.com/office/drawing/2014/main" id="{B92F6C82-1AE6-EEF5-9A41-6D49E3BA3BB7}"/>
-              </a:ext>
-            </a:extLst>
-          </p:cNvPr>
-          <p:cNvSpPr/>
-          <p:nvPr/>
-        </p:nvSpPr>
-        <p:spPr>
-          <a:xfrm>
-            <a:off x="10592752" y="4886902"/>
-            <a:ext cx="420624" cy="420624"/>
-          </a:xfrm>
-          <a:prstGeom prst="rect">
-            <a:avLst/>
-          </a:prstGeom>
-          <a:solidFill>
-            <a:srgbClr val="1C7293">
-              <a:alpha val="45000"/>
-            </a:srgbClr>
-          </a:solidFill>
-          <a:ln w="12700">
-            <a:solidFill>
-              <a:srgbClr val="FFFFFF"/>
-            </a:solidFill>
-            <a:prstDash val="solid"/>
-          </a:ln>
-        </p:spPr>
-      </p:sp>
-      <p:sp>
-        <p:nvSpPr>
-          <p:cNvPr id="37" name="Shape 34">
-            <a:extLst>
-              <a:ext uri="{FF2B5EF4-FFF2-40B4-BE49-F238E27FC236}">
-                <a16:creationId xmlns:a16="http://schemas.microsoft.com/office/drawing/2014/main" id="{DD5FF67B-A9B2-560F-7348-C23EB2A2E7EA}"/>
-              </a:ext>
-            </a:extLst>
-          </p:cNvPr>
-          <p:cNvSpPr/>
-          <p:nvPr/>
-        </p:nvSpPr>
-        <p:spPr>
-          <a:xfrm>
-            <a:off x="8763952" y="5453830"/>
-            <a:ext cx="420624" cy="420624"/>
-          </a:xfrm>
-          <a:prstGeom prst="rect">
-            <a:avLst/>
-          </a:prstGeom>
-          <a:solidFill>
-            <a:srgbClr val="1C7293">
-              <a:alpha val="45000"/>
-            </a:srgbClr>
-          </a:solidFill>
-          <a:ln w="12700">
-            <a:solidFill>
-              <a:srgbClr val="FFFFFF"/>
-            </a:solidFill>
-            <a:prstDash val="solid"/>
-          </a:ln>
-        </p:spPr>
-      </p:sp>
-      <p:sp>
-        <p:nvSpPr>
-          <p:cNvPr id="38" name="Shape 35">
-            <a:extLst>
-              <a:ext uri="{FF2B5EF4-FFF2-40B4-BE49-F238E27FC236}">
-                <a16:creationId xmlns:a16="http://schemas.microsoft.com/office/drawing/2014/main" id="{EEBAF620-C9C5-868D-7735-E95025E976C6}"/>
-              </a:ext>
-            </a:extLst>
-          </p:cNvPr>
-          <p:cNvSpPr/>
-          <p:nvPr/>
-        </p:nvSpPr>
-        <p:spPr>
-          <a:xfrm>
-            <a:off x="9221152" y="5453830"/>
-            <a:ext cx="420624" cy="420624"/>
-          </a:xfrm>
-          <a:prstGeom prst="rect">
-            <a:avLst/>
-          </a:prstGeom>
-          <a:solidFill>
-            <a:srgbClr val="1C7293">
-              <a:alpha val="45000"/>
-            </a:srgbClr>
-          </a:solidFill>
-          <a:ln w="12700">
-            <a:solidFill>
-              <a:srgbClr val="FFFFFF"/>
-            </a:solidFill>
-            <a:prstDash val="solid"/>
-          </a:ln>
-        </p:spPr>
-      </p:sp>
-      <p:sp>
-        <p:nvSpPr>
-          <p:cNvPr id="39" name="Shape 36">
-            <a:extLst>
-              <a:ext uri="{FF2B5EF4-FFF2-40B4-BE49-F238E27FC236}">
-                <a16:creationId xmlns:a16="http://schemas.microsoft.com/office/drawing/2014/main" id="{F936E8AD-5844-73D6-2EB3-E49D1BF406C3}"/>
-              </a:ext>
-            </a:extLst>
-          </p:cNvPr>
-          <p:cNvSpPr/>
-          <p:nvPr/>
-        </p:nvSpPr>
-        <p:spPr>
-          <a:xfrm>
-            <a:off x="9678352" y="5453830"/>
-            <a:ext cx="420624" cy="420624"/>
-          </a:xfrm>
-          <a:prstGeom prst="rect">
-            <a:avLst/>
-          </a:prstGeom>
-          <a:solidFill>
-            <a:srgbClr val="1C7293">
-              <a:alpha val="45000"/>
-            </a:srgbClr>
-          </a:solidFill>
-          <a:ln w="12700">
-            <a:solidFill>
-              <a:srgbClr val="FFFFFF"/>
-            </a:solidFill>
-            <a:prstDash val="solid"/>
-          </a:ln>
-        </p:spPr>
-      </p:sp>
-      <p:sp>
-        <p:nvSpPr>
-          <p:cNvPr id="40" name="Shape 37">
-            <a:extLst>
-              <a:ext uri="{FF2B5EF4-FFF2-40B4-BE49-F238E27FC236}">
-                <a16:creationId xmlns:a16="http://schemas.microsoft.com/office/drawing/2014/main" id="{B61341AE-CB6B-986C-78DE-43D13F0BDFD4}"/>
-              </a:ext>
-            </a:extLst>
-          </p:cNvPr>
-          <p:cNvSpPr/>
-          <p:nvPr/>
-        </p:nvSpPr>
-        <p:spPr>
-          <a:xfrm>
-            <a:off x="10135552" y="5453830"/>
-            <a:ext cx="420624" cy="420624"/>
-          </a:xfrm>
-          <a:prstGeom prst="rect">
-            <a:avLst/>
-          </a:prstGeom>
-          <a:solidFill>
-            <a:srgbClr val="1C7293">
-              <a:alpha val="45000"/>
-            </a:srgbClr>
-          </a:solidFill>
-          <a:ln w="12700">
-            <a:solidFill>
-              <a:srgbClr val="FFFFFF"/>
-            </a:solidFill>
-            <a:prstDash val="solid"/>
-          </a:ln>
-        </p:spPr>
-      </p:sp>
-      <p:sp>
-        <p:nvSpPr>
-          <p:cNvPr id="41" name="Shape 38">
-            <a:extLst>
-              <a:ext uri="{FF2B5EF4-FFF2-40B4-BE49-F238E27FC236}">
-                <a16:creationId xmlns:a16="http://schemas.microsoft.com/office/drawing/2014/main" id="{CB33C686-A16C-58C1-BEAE-CB26D1C83944}"/>
-              </a:ext>
-            </a:extLst>
-          </p:cNvPr>
-          <p:cNvSpPr/>
-          <p:nvPr/>
-        </p:nvSpPr>
-        <p:spPr>
-          <a:xfrm>
-            <a:off x="10592752" y="5453830"/>
-            <a:ext cx="420624" cy="420624"/>
-          </a:xfrm>
-          <a:prstGeom prst="rect">
-            <a:avLst/>
-          </a:prstGeom>
-          <a:solidFill>
-            <a:srgbClr val="E8871E"/>
-          </a:solidFill>
-          <a:ln w="12700">
-            <a:solidFill>
-              <a:srgbClr val="FFFFFF"/>
-            </a:solidFill>
-            <a:prstDash val="solid"/>
-          </a:ln>
-        </p:spPr>
-      </p:sp>
-      <p:sp>
-        <p:nvSpPr>
-          <p:cNvPr id="42" name="Text 39">
-            <a:extLst>
-              <a:ext uri="{FF2B5EF4-FFF2-40B4-BE49-F238E27FC236}">
-                <a16:creationId xmlns:a16="http://schemas.microsoft.com/office/drawing/2014/main" id="{6B5CAA4F-2103-FC91-7C92-04720867B004}"/>
-              </a:ext>
-            </a:extLst>
-          </p:cNvPr>
-          <p:cNvSpPr/>
-          <p:nvPr/>
-        </p:nvSpPr>
-        <p:spPr>
-          <a:xfrm>
-            <a:off x="8666796" y="6066478"/>
-            <a:ext cx="2748916" cy="572066"/>
-          </a:xfrm>
-          <a:prstGeom prst="rect">
-            <a:avLst/>
-          </a:prstGeom>
-          <a:noFill/>
-          <a:ln/>
-        </p:spPr>
-        <p:txBody>
-          <a:bodyPr wrap="square" rtlCol="0" anchor="ctr"/>
-          <a:lstStyle/>
-          <a:p>
-            <a:pPr marL="0" indent="0">
-              <a:buNone/>
-            </a:pPr>
-            <a:r>
-              <a:rPr lang="en-US" sz="1200" dirty="0">
-                <a:latin typeface="Calibri" pitchFamily="34" charset="0"/>
-                <a:ea typeface="Calibri" pitchFamily="34" charset="-122"/>
-                <a:cs typeface="Calibri" pitchFamily="34" charset="-120"/>
-              </a:rPr>
-              <a:t>Each fold takes a turn as the test split; results are averaged — makes efficient use of small datasets.</a:t>
-            </a:r>
-            <a:endParaRPr lang="en-US" sz="1200" dirty="0"/>
-          </a:p>
-        </p:txBody>
-      </p:sp>
-    </p:spTree>
-    <p:extLst>
-      <p:ext uri="{BB962C8B-B14F-4D97-AF65-F5344CB8AC3E}">
-        <p14:creationId xmlns:p14="http://schemas.microsoft.com/office/powerpoint/2010/main" val="2914649841"/>
-      </p:ext>
-    </p:extLst>
-  </p:cSld>
-  <p:clrMapOvr>
-    <a:masterClrMapping/>
-  </p:clrMapOvr>
-</p:sld>
-</file>
-
-<file path=ppt/slides/slide12.xml><?xml version="1.0" encoding="utf-8"?>
-<p:sld xmlns:a="http://schemas.openxmlformats.org/drawingml/2006/main" xmlns:r="http://schemas.openxmlformats.org/officeDocument/2006/relationships" xmlns:p="http://schemas.openxmlformats.org/presentationml/2006/main">
-  <p:cSld>
-    <p:spTree>
-      <p:nvGrpSpPr>
-        <p:cNvPr id="1" name=""/>
-        <p:cNvGrpSpPr/>
-        <p:nvPr/>
-      </p:nvGrpSpPr>
-      <p:grpSpPr>
-        <a:xfrm>
-          <a:off x="0" y="0"/>
-          <a:ext cx="0" cy="0"/>
-          <a:chOff x="0" y="0"/>
-          <a:chExt cx="0" cy="0"/>
-        </a:xfrm>
-      </p:grpSpPr>
-      <p:sp>
-        <p:nvSpPr>
-          <p:cNvPr id="2" name="Text 0"/>
-          <p:cNvSpPr/>
-          <p:nvPr/>
-        </p:nvSpPr>
-        <p:spPr>
-          <a:xfrm>
-            <a:off x="548640" y="384048"/>
-            <a:ext cx="7315200" cy="320040"/>
-          </a:xfrm>
-          <a:prstGeom prst="rect">
-            <a:avLst/>
-          </a:prstGeom>
-          <a:noFill/>
-          <a:ln/>
-        </p:spPr>
-        <p:txBody>
-          <a:bodyPr wrap="square" rtlCol="0" anchor="ctr"/>
-          <a:lstStyle/>
-          <a:p>
-            <a:pPr marL="0" indent="0">
-              <a:buNone/>
-            </a:pPr>
-            <a:r>
-              <a:rPr lang="en-US" sz="1200" b="1" kern="0" spc="200" dirty="0">
-                <a:latin typeface="Calibri" pitchFamily="34" charset="0"/>
-                <a:ea typeface="Calibri" pitchFamily="34" charset="-122"/>
-                <a:cs typeface="Calibri" pitchFamily="34" charset="-120"/>
-              </a:rPr>
-              <a:t>MAXIMUM LIKELIHOOD ESTIMATION</a:t>
-            </a:r>
-            <a:endParaRPr lang="en-US" sz="1200" dirty="0"/>
-          </a:p>
-        </p:txBody>
-      </p:sp>
-      <mc:AlternateContent xmlns:mc="http://schemas.openxmlformats.org/markup-compatibility/2006">
-        <mc:Choice xmlns:a14="http://schemas.microsoft.com/office/drawing/2010/main" Requires="a14">
-          <p:sp>
-            <p:nvSpPr>
-              <p:cNvPr id="3" name="Text 1"/>
-              <p:cNvSpPr/>
-              <p:nvPr/>
-            </p:nvSpPr>
-            <p:spPr>
-              <a:xfrm>
-                <a:off x="548640" y="658368"/>
-                <a:ext cx="11064240" cy="822960"/>
-              </a:xfrm>
-              <a:prstGeom prst="rect">
-                <a:avLst/>
-              </a:prstGeom>
-              <a:noFill/>
-              <a:ln/>
-            </p:spPr>
-            <p:txBody>
-              <a:bodyPr wrap="square" rtlCol="0" anchor="t"/>
-              <a:lstStyle/>
-              <a:p>
-                <a:pPr marL="0" indent="0">
-                  <a:buNone/>
-                </a:pPr>
-                <a:r>
-                  <a:rPr lang="en-US" sz="3200" b="1" dirty="0">
-                    <a:latin typeface="Cambria" pitchFamily="34" charset="0"/>
-                    <a:ea typeface="Cambria" pitchFamily="34" charset="-122"/>
-                    <a:cs typeface="Cambria" pitchFamily="34" charset="-120"/>
-                  </a:rPr>
-                  <a:t>Pick the </a:t>
-                </a:r>
-                <a14:m>
-                  <m:oMath xmlns:m="http://schemas.openxmlformats.org/officeDocument/2006/math">
-                    <m:r>
-                      <a:rPr lang="en-US" sz="3200" b="1" i="1" dirty="0" smtClean="0">
-                        <a:latin typeface="Cambria Math" panose="02040503050406030204" pitchFamily="18" charset="0"/>
-                        <a:ea typeface="Cambria" pitchFamily="34" charset="-122"/>
-                        <a:cs typeface="Cambria" pitchFamily="34" charset="-120"/>
-                      </a:rPr>
-                      <m:t>𝜽</m:t>
-                    </m:r>
-                  </m:oMath>
-                </a14:m>
-                <a:r>
-                  <a:rPr lang="en-US" sz="3200" b="1" dirty="0">
-                    <a:latin typeface="Cambria" pitchFamily="34" charset="0"/>
-                    <a:ea typeface="Cambria" pitchFamily="34" charset="-122"/>
-                    <a:cs typeface="Cambria" pitchFamily="34" charset="-120"/>
-                  </a:rPr>
-                  <a:t> That Makes the Data Most Probable</a:t>
-                </a:r>
-                <a:endParaRPr lang="en-US" sz="3200" dirty="0"/>
-              </a:p>
-            </p:txBody>
-          </p:sp>
-        </mc:Choice>
-        <mc:Fallback>
-          <p:sp>
-            <p:nvSpPr>
-              <p:cNvPr id="3" name="Text 1"/>
-              <p:cNvSpPr>
-                <a:spLocks noRot="1" noChangeAspect="1" noMove="1" noResize="1" noEditPoints="1" noAdjustHandles="1" noChangeArrowheads="1" noChangeShapeType="1" noTextEdit="1"/>
-              </p:cNvSpPr>
-              <p:nvPr/>
-            </p:nvSpPr>
-            <p:spPr>
-              <a:xfrm>
-                <a:off x="548640" y="658368"/>
-                <a:ext cx="11064240" cy="822960"/>
-              </a:xfrm>
-              <a:prstGeom prst="rect">
-                <a:avLst/>
-              </a:prstGeom>
-              <a:blipFill>
-                <a:blip r:embed="rId3"/>
-                <a:stretch>
-                  <a:fillRect l="-1376" t="-10606"/>
-                </a:stretch>
-              </a:blipFill>
-              <a:ln/>
-            </p:spPr>
-            <p:txBody>
-              <a:bodyPr/>
-              <a:lstStyle/>
-              <a:p>
-                <a:r>
-                  <a:rPr lang="en-US">
-                    <a:noFill/>
-                  </a:rPr>
-                  <a:t> </a:t>
-                </a:r>
-              </a:p>
-            </p:txBody>
-          </p:sp>
-        </mc:Fallback>
-      </mc:AlternateContent>
-      <p:sp>
-        <p:nvSpPr>
-          <p:cNvPr id="4" name="Shape 2"/>
-          <p:cNvSpPr/>
-          <p:nvPr/>
-        </p:nvSpPr>
-        <p:spPr>
-          <a:xfrm>
-            <a:off x="548640" y="1737360"/>
-            <a:ext cx="5394960" cy="4434840"/>
-          </a:xfrm>
-          <a:prstGeom prst="roundRect">
-            <a:avLst>
-              <a:gd name="adj" fmla="val 1856"/>
-            </a:avLst>
-          </a:prstGeom>
-          <a:solidFill>
-            <a:srgbClr val="FFFFFF"/>
-          </a:solidFill>
-          <a:ln w="12700">
-            <a:solidFill>
-              <a:srgbClr val="D8E1E8"/>
-            </a:solidFill>
-            <a:prstDash val="solid"/>
-          </a:ln>
-          <a:effectLst>
-            <a:outerShdw blurRad="76200" dist="25400" dir="5400000" algn="bl" rotWithShape="0">
-              <a:srgbClr val="000000">
-                <a:alpha val="8000"/>
-              </a:srgbClr>
-            </a:outerShdw>
-          </a:effectLst>
-        </p:spPr>
-      </p:sp>
-      <p:sp>
-        <p:nvSpPr>
-          <p:cNvPr id="5" name="Text 3"/>
-          <p:cNvSpPr/>
-          <p:nvPr/>
-        </p:nvSpPr>
-        <p:spPr>
-          <a:xfrm>
-            <a:off x="822960" y="1920240"/>
-            <a:ext cx="4846320" cy="365760"/>
-          </a:xfrm>
-          <a:prstGeom prst="rect">
-            <a:avLst/>
-          </a:prstGeom>
-          <a:noFill/>
-          <a:ln/>
-        </p:spPr>
-        <p:txBody>
-          <a:bodyPr wrap="square" rtlCol="0" anchor="ctr"/>
-          <a:lstStyle/>
-          <a:p>
-            <a:pPr marL="0" indent="0">
-              <a:buNone/>
-            </a:pPr>
-            <a:r>
-              <a:rPr lang="en-US" sz="1600" b="1" dirty="0">
-                <a:latin typeface="Cambria" pitchFamily="34" charset="0"/>
-                <a:ea typeface="Cambria" pitchFamily="34" charset="-122"/>
-                <a:cs typeface="Cambria" pitchFamily="34" charset="-120"/>
-              </a:rPr>
-              <a:t>The Estimator</a:t>
-            </a:r>
-            <a:endParaRPr lang="en-US" sz="1600" dirty="0"/>
-          </a:p>
-        </p:txBody>
-      </p:sp>
-      <p:sp>
-        <p:nvSpPr>
-          <p:cNvPr id="7" name="Text 5"/>
-          <p:cNvSpPr/>
-          <p:nvPr/>
-        </p:nvSpPr>
-        <p:spPr>
-          <a:xfrm>
-            <a:off x="822960" y="3520440"/>
-            <a:ext cx="4846320" cy="2560320"/>
-          </a:xfrm>
-          <a:prstGeom prst="rect">
-            <a:avLst/>
-          </a:prstGeom>
-          <a:noFill/>
-          <a:ln/>
-        </p:spPr>
-        <p:txBody>
-          <a:bodyPr wrap="square" rtlCol="0" anchor="t"/>
-          <a:lstStyle/>
-          <a:p>
-            <a:pPr marL="228600" indent="-228600">
-              <a:lnSpc>
-                <a:spcPct val="115000"/>
-              </a:lnSpc>
-              <a:spcAft>
-                <a:spcPts val="1200"/>
-              </a:spcAft>
-              <a:buSzPct val="100000"/>
-              <a:buChar char="•"/>
-            </a:pPr>
-            <a:r>
-              <a:rPr lang="en-US" sz="2400" dirty="0">
-                <a:latin typeface="Calibri" pitchFamily="34" charset="0"/>
-                <a:ea typeface="Calibri" pitchFamily="34" charset="-122"/>
-                <a:cs typeface="Calibri" pitchFamily="34" charset="-120"/>
-              </a:rPr>
-              <a:t>Products of many probabilities underflow numerically → take the log; argmax is unchanged</a:t>
-            </a:r>
-            <a:endParaRPr lang="en-US" sz="2400" dirty="0"/>
-          </a:p>
-          <a:p>
-            <a:pPr marL="228600" indent="-228600">
-              <a:lnSpc>
-                <a:spcPct val="115000"/>
-              </a:lnSpc>
-              <a:spcAft>
-                <a:spcPts val="1200"/>
-              </a:spcAft>
-              <a:buSzPct val="100000"/>
-              <a:buChar char="•"/>
-            </a:pPr>
-            <a:r>
-              <a:rPr lang="en-US" sz="2400" dirty="0">
-                <a:latin typeface="Calibri" pitchFamily="34" charset="0"/>
-                <a:ea typeface="Calibri" pitchFamily="34" charset="-122"/>
-                <a:cs typeface="Calibri" pitchFamily="34" charset="-120"/>
-              </a:rPr>
-              <a:t>Equivalent to minimizing the negative log-likelihood (NLL)</a:t>
-            </a:r>
-            <a:endParaRPr lang="en-US" sz="2400" dirty="0"/>
-          </a:p>
-        </p:txBody>
-      </p:sp>
-      <p:sp>
-        <p:nvSpPr>
-          <p:cNvPr id="8" name="Shape 6"/>
-          <p:cNvSpPr/>
-          <p:nvPr/>
-        </p:nvSpPr>
-        <p:spPr>
-          <a:xfrm>
-            <a:off x="6217920" y="1737360"/>
-            <a:ext cx="5394960" cy="4434840"/>
-          </a:xfrm>
-          <a:prstGeom prst="roundRect">
-            <a:avLst>
-              <a:gd name="adj" fmla="val 1856"/>
-            </a:avLst>
-          </a:prstGeom>
-          <a:solidFill>
-            <a:srgbClr val="FFFFFF"/>
-          </a:solidFill>
-          <a:ln w="12700">
-            <a:solidFill>
-              <a:srgbClr val="D8E1E8"/>
-            </a:solidFill>
-            <a:prstDash val="solid"/>
-          </a:ln>
-          <a:effectLst>
-            <a:outerShdw blurRad="76200" dist="25400" dir="5400000" algn="bl" rotWithShape="0">
-              <a:srgbClr val="000000">
-                <a:alpha val="8000"/>
-              </a:srgbClr>
-            </a:outerShdw>
-          </a:effectLst>
-        </p:spPr>
-      </p:sp>
-      <p:sp>
-        <p:nvSpPr>
-          <p:cNvPr id="9" name="Text 7"/>
-          <p:cNvSpPr/>
-          <p:nvPr/>
-        </p:nvSpPr>
-        <p:spPr>
-          <a:xfrm>
-            <a:off x="6492240" y="1920240"/>
-            <a:ext cx="4846320" cy="365760"/>
-          </a:xfrm>
-          <a:prstGeom prst="rect">
-            <a:avLst/>
-          </a:prstGeom>
-          <a:noFill/>
-          <a:ln/>
-        </p:spPr>
-        <p:txBody>
-          <a:bodyPr wrap="square" rtlCol="0" anchor="ctr"/>
-          <a:lstStyle/>
-          <a:p>
-            <a:pPr marL="0" indent="0">
-              <a:buNone/>
-            </a:pPr>
-            <a:r>
-              <a:rPr lang="en-US" sz="1600" b="1" dirty="0">
-                <a:latin typeface="Cambria" pitchFamily="34" charset="0"/>
-                <a:ea typeface="Cambria" pitchFamily="34" charset="-122"/>
-                <a:cs typeface="Cambria" pitchFamily="34" charset="-120"/>
-              </a:rPr>
-              <a:t>Interpretation: Minimizing KL Divergence</a:t>
-            </a:r>
-            <a:endParaRPr lang="en-US" sz="1600" dirty="0"/>
-          </a:p>
-        </p:txBody>
-      </p:sp>
-      <p:sp>
-        <p:nvSpPr>
-          <p:cNvPr id="10" name="Text 8"/>
-          <p:cNvSpPr/>
-          <p:nvPr/>
-        </p:nvSpPr>
-        <p:spPr>
-          <a:xfrm>
-            <a:off x="6492240" y="2377440"/>
-            <a:ext cx="4846320" cy="3749040"/>
-          </a:xfrm>
-          <a:prstGeom prst="rect">
-            <a:avLst/>
-          </a:prstGeom>
-          <a:noFill/>
-          <a:ln/>
-        </p:spPr>
-        <p:txBody>
-          <a:bodyPr wrap="square" rtlCol="0" anchor="t"/>
-          <a:lstStyle/>
-          <a:p>
-            <a:pPr marL="228600" indent="-228600">
-              <a:lnSpc>
-                <a:spcPct val="115000"/>
-              </a:lnSpc>
-              <a:spcAft>
-                <a:spcPts val="1200"/>
-              </a:spcAft>
-              <a:buSzPct val="100000"/>
-              <a:buChar char="•"/>
-            </a:pPr>
-            <a:r>
-              <a:rPr lang="en-US" dirty="0">
-                <a:latin typeface="Calibri" pitchFamily="34" charset="0"/>
-                <a:ea typeface="Calibri" pitchFamily="34" charset="-122"/>
-                <a:cs typeface="Calibri" pitchFamily="34" charset="-120"/>
-              </a:rPr>
-              <a:t>MLE ≡ minimizing D_KL(p̂_data ‖ p_model) — making the model distribution match the empirical data distribution</a:t>
-            </a:r>
-            <a:endParaRPr lang="en-US" dirty="0"/>
-          </a:p>
-          <a:p>
-            <a:pPr marL="228600" indent="-228600">
-              <a:lnSpc>
-                <a:spcPct val="115000"/>
-              </a:lnSpc>
-              <a:spcAft>
-                <a:spcPts val="1200"/>
-              </a:spcAft>
-              <a:buSzPct val="100000"/>
-              <a:buChar char="•"/>
-            </a:pPr>
-            <a:r>
-              <a:rPr lang="en-US" dirty="0">
-                <a:latin typeface="Calibri" pitchFamily="34" charset="0"/>
-                <a:ea typeface="Calibri" pitchFamily="34" charset="-122"/>
-                <a:cs typeface="Calibri" pitchFamily="34" charset="-120"/>
-              </a:rPr>
-              <a:t>Equivalent to minimizing cross-entropy between the empirical and model distributions</a:t>
-            </a:r>
-            <a:endParaRPr lang="en-US" dirty="0"/>
-          </a:p>
-          <a:p>
-            <a:pPr marL="228600" indent="-228600">
-              <a:lnSpc>
-                <a:spcPct val="115000"/>
-              </a:lnSpc>
-              <a:spcAft>
-                <a:spcPts val="1200"/>
-              </a:spcAft>
-              <a:buSzPct val="100000"/>
-              <a:buChar char="•"/>
-            </a:pPr>
-            <a:r>
-              <a:rPr lang="en-US" dirty="0">
-                <a:latin typeface="Calibri" pitchFamily="34" charset="0"/>
-                <a:ea typeface="Calibri" pitchFamily="34" charset="-122"/>
-                <a:cs typeface="Calibri" pitchFamily="34" charset="-120"/>
-              </a:rPr>
-              <a:t>Mean squared error is exactly the cross-entropy between the empirical distribution and a Gaussian model — this is why linear regression's MSE cost is principled, not arbitrary</a:t>
-            </a:r>
-            <a:endParaRPr lang="en-US" dirty="0"/>
-          </a:p>
-        </p:txBody>
-      </p:sp>
-      <p:sp>
-        <p:nvSpPr>
-          <p:cNvPr id="11" name="Text 9"/>
-          <p:cNvSpPr/>
-          <p:nvPr/>
-        </p:nvSpPr>
-        <p:spPr>
-          <a:xfrm>
-            <a:off x="11365992" y="6400800"/>
-            <a:ext cx="548640" cy="274320"/>
-          </a:xfrm>
-          <a:prstGeom prst="rect">
-            <a:avLst/>
-          </a:prstGeom>
-          <a:noFill/>
-          <a:ln/>
-        </p:spPr>
-        <p:txBody>
-          <a:bodyPr wrap="square" rtlCol="0" anchor="ctr"/>
-          <a:lstStyle/>
-          <a:p>
-            <a:pPr marL="0" indent="0" algn="r">
-              <a:buNone/>
-            </a:pPr>
-            <a:r>
-              <a:rPr lang="en-US" sz="1000" dirty="0">
-                <a:solidFill>
-                  <a:srgbClr val="5B6B7A"/>
-                </a:solidFill>
-                <a:latin typeface="Calibri" pitchFamily="34" charset="0"/>
-                <a:ea typeface="Calibri" pitchFamily="34" charset="-122"/>
-                <a:cs typeface="Calibri" pitchFamily="34" charset="-120"/>
-              </a:rPr>
-              <a:t>19</a:t>
-            </a:r>
-            <a:endParaRPr lang="en-US" sz="1000" dirty="0"/>
-          </a:p>
-        </p:txBody>
-      </p:sp>
-      <p:pic>
-        <p:nvPicPr>
-          <p:cNvPr id="13" name="Picture 12">
-            <a:extLst>
-              <a:ext uri="{FF2B5EF4-FFF2-40B4-BE49-F238E27FC236}">
-                <a16:creationId xmlns:a16="http://schemas.microsoft.com/office/drawing/2014/main" id="{7BAAAB9B-690D-5277-B728-596D4BC579D6}"/>
-              </a:ext>
-            </a:extLst>
-          </p:cNvPr>
-          <p:cNvPicPr>
-            <a:picLocks noChangeAspect="1"/>
-          </p:cNvPicPr>
-          <p:nvPr/>
-        </p:nvPicPr>
-        <p:blipFill>
-          <a:blip r:embed="rId4"/>
-          <a:stretch>
-            <a:fillRect/>
-          </a:stretch>
-        </p:blipFill>
-        <p:spPr>
-          <a:xfrm>
-            <a:off x="822960" y="2325497"/>
-            <a:ext cx="3681659" cy="617728"/>
-          </a:xfrm>
-          <a:prstGeom prst="rect">
-            <a:avLst/>
-          </a:prstGeom>
-        </p:spPr>
-      </p:pic>
-    </p:spTree>
-  </p:cSld>
-  <p:clrMapOvr>
-    <a:masterClrMapping/>
-  </p:clrMapOvr>
-</p:sld>
-</file>
-
-<file path=ppt/slides/slide13.xml><?xml version="1.0" encoding="utf-8"?>
-<p:sld xmlns:a="http://schemas.openxmlformats.org/drawingml/2006/main" xmlns:r="http://schemas.openxmlformats.org/officeDocument/2006/relationships" xmlns:p="http://schemas.openxmlformats.org/presentationml/2006/main">
-  <p:cSld>
-    <p:spTree>
-      <p:nvGrpSpPr>
-        <p:cNvPr id="1" name=""/>
-        <p:cNvGrpSpPr/>
-        <p:nvPr/>
-      </p:nvGrpSpPr>
-      <p:grpSpPr>
-        <a:xfrm>
-          <a:off x="0" y="0"/>
-          <a:ext cx="0" cy="0"/>
-          <a:chOff x="0" y="0"/>
-          <a:chExt cx="0" cy="0"/>
-        </a:xfrm>
-      </p:grpSpPr>
-      <p:sp>
-        <p:nvSpPr>
-          <p:cNvPr id="2" name="Text 0"/>
-          <p:cNvSpPr/>
-          <p:nvPr/>
-        </p:nvSpPr>
-        <p:spPr>
-          <a:xfrm>
-            <a:off x="548640" y="384048"/>
-            <a:ext cx="7315200" cy="320040"/>
-          </a:xfrm>
-          <a:prstGeom prst="rect">
-            <a:avLst/>
-          </a:prstGeom>
-          <a:noFill/>
-          <a:ln/>
-        </p:spPr>
-        <p:txBody>
-          <a:bodyPr wrap="square" rtlCol="0" anchor="ctr"/>
-          <a:lstStyle/>
-          <a:p>
-            <a:pPr marL="0" indent="0">
-              <a:buNone/>
-            </a:pPr>
-            <a:r>
-              <a:rPr lang="en-US" sz="1200" b="1" kern="0" spc="200" dirty="0">
-                <a:solidFill>
-                  <a:srgbClr val="E8871E"/>
-                </a:solidFill>
-                <a:latin typeface="Calibri" pitchFamily="34" charset="0"/>
-                <a:ea typeface="Calibri" pitchFamily="34" charset="-122"/>
-                <a:cs typeface="Calibri" pitchFamily="34" charset="-120"/>
-              </a:rPr>
-              <a:t>WHY MLE?</a:t>
-            </a:r>
-            <a:endParaRPr lang="en-US" sz="1200" dirty="0"/>
-          </a:p>
-        </p:txBody>
-      </p:sp>
-      <p:sp>
-        <p:nvSpPr>
-          <p:cNvPr id="3" name="Text 1"/>
-          <p:cNvSpPr/>
-          <p:nvPr/>
-        </p:nvSpPr>
-        <p:spPr>
-          <a:xfrm>
-            <a:off x="548640" y="658368"/>
-            <a:ext cx="11064240" cy="822960"/>
-          </a:xfrm>
-          <a:prstGeom prst="rect">
-            <a:avLst/>
-          </a:prstGeom>
-          <a:noFill/>
-          <a:ln/>
-        </p:spPr>
-        <p:txBody>
-          <a:bodyPr wrap="square" rtlCol="0" anchor="t"/>
-          <a:lstStyle/>
-          <a:p>
-            <a:pPr marL="0" indent="0">
-              <a:buNone/>
-            </a:pPr>
-            <a:r>
-              <a:rPr lang="en-US" sz="3200" b="1" dirty="0">
-                <a:solidFill>
-                  <a:srgbClr val="0B3D62"/>
-                </a:solidFill>
-                <a:latin typeface="Cambria" pitchFamily="34" charset="0"/>
-                <a:ea typeface="Cambria" pitchFamily="34" charset="-122"/>
-                <a:cs typeface="Cambria" pitchFamily="34" charset="-120"/>
-              </a:rPr>
-              <a:t>MLE Is (Asymptotically) the Best Estimator</a:t>
-            </a:r>
-            <a:endParaRPr lang="en-US" sz="3200" dirty="0"/>
-          </a:p>
-        </p:txBody>
-      </p:sp>
-      <p:sp>
-        <p:nvSpPr>
-          <p:cNvPr id="4" name="Text 2"/>
-          <p:cNvSpPr/>
-          <p:nvPr/>
-        </p:nvSpPr>
-        <p:spPr>
-          <a:xfrm>
-            <a:off x="548640" y="1783080"/>
-            <a:ext cx="5577840" cy="4297680"/>
-          </a:xfrm>
-          <a:prstGeom prst="rect">
-            <a:avLst/>
-          </a:prstGeom>
-          <a:noFill/>
-          <a:ln/>
-        </p:spPr>
-        <p:txBody>
-          <a:bodyPr wrap="square" rtlCol="0" anchor="t"/>
-          <a:lstStyle/>
-          <a:p>
-            <a:pPr marL="228600" indent="-228600">
-              <a:lnSpc>
-                <a:spcPct val="115000"/>
-              </a:lnSpc>
-              <a:spcAft>
-                <a:spcPts val="1500"/>
-              </a:spcAft>
-              <a:buSzPct val="100000"/>
-              <a:buChar char="•"/>
-            </a:pPr>
-            <a:r>
-              <a:rPr lang="en-US" sz="1450" dirty="0">
-                <a:solidFill>
-                  <a:srgbClr val="1B2733"/>
-                </a:solidFill>
-                <a:latin typeface="Calibri" pitchFamily="34" charset="0"/>
-                <a:ea typeface="Calibri" pitchFamily="34" charset="-122"/>
-                <a:cs typeface="Calibri" pitchFamily="34" charset="-120"/>
-              </a:rPr>
-              <a:t>Consistency: under two conditions, θ_ML → true θ as m → ∞</a:t>
-            </a:r>
-            <a:endParaRPr lang="en-US" sz="1450" dirty="0"/>
-          </a:p>
-          <a:p>
-            <a:pPr marL="228600" indent="-228600">
-              <a:lnSpc>
-                <a:spcPct val="115000"/>
-              </a:lnSpc>
-              <a:spcAft>
-                <a:spcPts val="1500"/>
-              </a:spcAft>
-              <a:buSzPct val="100000"/>
-              <a:buChar char="•"/>
-            </a:pPr>
-            <a:r>
-              <a:rPr lang="en-US" sz="1450" dirty="0">
-                <a:solidFill>
-                  <a:srgbClr val="1B2733"/>
-                </a:solidFill>
-                <a:latin typeface="Calibri" pitchFamily="34" charset="0"/>
-                <a:ea typeface="Calibri" pitchFamily="34" charset="-122"/>
-                <a:cs typeface="Calibri" pitchFamily="34" charset="-120"/>
-              </a:rPr>
-              <a:t>  (1) the true distribution p_data lies inside the model family p_model(·;θ)</a:t>
-            </a:r>
-            <a:endParaRPr lang="en-US" sz="1450" dirty="0"/>
-          </a:p>
-          <a:p>
-            <a:pPr marL="228600" indent="-228600">
-              <a:lnSpc>
-                <a:spcPct val="115000"/>
-              </a:lnSpc>
-              <a:spcAft>
-                <a:spcPts val="1500"/>
-              </a:spcAft>
-              <a:buSzPct val="100000"/>
-              <a:buChar char="•"/>
-            </a:pPr>
-            <a:r>
-              <a:rPr lang="en-US" sz="1450" dirty="0">
-                <a:solidFill>
-                  <a:srgbClr val="1B2733"/>
-                </a:solidFill>
-                <a:latin typeface="Calibri" pitchFamily="34" charset="0"/>
-                <a:ea typeface="Calibri" pitchFamily="34" charset="-122"/>
-                <a:cs typeface="Calibri" pitchFamily="34" charset="-120"/>
-              </a:rPr>
-              <a:t>  (2) p_data corresponds to exactly one value of θ (identifiability)</a:t>
-            </a:r>
-            <a:endParaRPr lang="en-US" sz="1450" dirty="0"/>
-          </a:p>
-          <a:p>
-            <a:pPr marL="228600" indent="-228600">
-              <a:lnSpc>
-                <a:spcPct val="115000"/>
-              </a:lnSpc>
-              <a:spcAft>
-                <a:spcPts val="1500"/>
-              </a:spcAft>
-              <a:buSzPct val="100000"/>
-              <a:buChar char="•"/>
-            </a:pPr>
-            <a:r>
-              <a:rPr lang="en-US" sz="1450" dirty="0">
-                <a:solidFill>
-                  <a:srgbClr val="1B2733"/>
-                </a:solidFill>
-                <a:latin typeface="Calibri" pitchFamily="34" charset="0"/>
-                <a:ea typeface="Calibri" pitchFamily="34" charset="-122"/>
-                <a:cs typeface="Calibri" pitchFamily="34" charset="-120"/>
-              </a:rPr>
-              <a:t>Statistical efficiency: among consistent estimators, MLE achieves the lowest possible MSE as m grows — the Cramér–Rao lower bound</a:t>
-            </a:r>
-            <a:endParaRPr lang="en-US" sz="1450" dirty="0"/>
-          </a:p>
-          <a:p>
-            <a:pPr marL="228600" indent="-228600">
-              <a:lnSpc>
-                <a:spcPct val="115000"/>
-              </a:lnSpc>
-              <a:spcAft>
-                <a:spcPts val="1500"/>
-              </a:spcAft>
-              <a:buSzPct val="100000"/>
-              <a:buChar char="•"/>
-            </a:pPr>
-            <a:r>
-              <a:rPr lang="en-US" sz="1450" dirty="0">
-                <a:solidFill>
-                  <a:srgbClr val="1B2733"/>
-                </a:solidFill>
-                <a:latin typeface="Calibri" pitchFamily="34" charset="0"/>
-                <a:ea typeface="Calibri" pitchFamily="34" charset="-122"/>
-                <a:cs typeface="Calibri" pitchFamily="34" charset="-120"/>
-              </a:rPr>
-              <a:t>Practical takeaway: MLE is the default choice for machine learning; add regularization (e.g. weight decay) when m is too small and overfitting appears</a:t>
-            </a:r>
-            <a:endParaRPr lang="en-US" sz="1450" dirty="0"/>
-          </a:p>
-        </p:txBody>
-      </p:sp>
-      <p:sp>
-        <p:nvSpPr>
-          <p:cNvPr id="5" name="Shape 3"/>
-          <p:cNvSpPr/>
-          <p:nvPr/>
-        </p:nvSpPr>
-        <p:spPr>
-          <a:xfrm>
-            <a:off x="6492240" y="1783080"/>
-            <a:ext cx="5120640" cy="4297680"/>
-          </a:xfrm>
-          <a:prstGeom prst="roundRect">
-            <a:avLst>
-              <a:gd name="adj" fmla="val 1915"/>
-            </a:avLst>
-          </a:prstGeom>
-          <a:solidFill>
-            <a:srgbClr val="F4F7FA"/>
-          </a:solidFill>
-          <a:ln w="12700">
-            <a:solidFill>
-              <a:srgbClr val="F4F7FA"/>
-            </a:solidFill>
-            <a:prstDash val="solid"/>
-          </a:ln>
-          <a:effectLst>
-            <a:outerShdw blurRad="76200" dist="25400" dir="5400000" algn="bl" rotWithShape="0">
-              <a:srgbClr val="000000">
-                <a:alpha val="8000"/>
-              </a:srgbClr>
-            </a:outerShdw>
-          </a:effectLst>
-        </p:spPr>
-      </p:sp>
-      <p:sp>
-        <p:nvSpPr>
-          <p:cNvPr id="6" name="Text 4"/>
-          <p:cNvSpPr/>
-          <p:nvPr/>
-        </p:nvSpPr>
-        <p:spPr>
-          <a:xfrm>
-            <a:off x="6766560" y="1965960"/>
-            <a:ext cx="4572000" cy="365760"/>
-          </a:xfrm>
-          <a:prstGeom prst="rect">
-            <a:avLst/>
-          </a:prstGeom>
-          <a:noFill/>
-          <a:ln/>
-        </p:spPr>
-        <p:txBody>
-          <a:bodyPr wrap="square" rtlCol="0" anchor="ctr"/>
-          <a:lstStyle/>
-          <a:p>
-            <a:pPr marL="0" indent="0">
-              <a:buNone/>
-            </a:pPr>
-            <a:r>
-              <a:rPr lang="en-US" sz="1500" b="1" dirty="0">
-                <a:solidFill>
-                  <a:srgbClr val="0B3D62"/>
-                </a:solidFill>
-                <a:latin typeface="Cambria" pitchFamily="34" charset="0"/>
-                <a:ea typeface="Cambria" pitchFamily="34" charset="-122"/>
-                <a:cs typeface="Cambria" pitchFamily="34" charset="-120"/>
-              </a:rPr>
-              <a:t>Linear Regression = MLE</a:t>
-            </a:r>
-            <a:endParaRPr lang="en-US" sz="1500" dirty="0"/>
-          </a:p>
-        </p:txBody>
-      </p:sp>
-      <p:sp>
-        <p:nvSpPr>
-          <p:cNvPr id="7" name="Text 5"/>
-          <p:cNvSpPr/>
-          <p:nvPr/>
-        </p:nvSpPr>
-        <p:spPr>
-          <a:xfrm>
-            <a:off x="6766560" y="2423160"/>
-            <a:ext cx="4572000" cy="1280160"/>
-          </a:xfrm>
-          <a:prstGeom prst="rect">
-            <a:avLst/>
-          </a:prstGeom>
-          <a:noFill/>
-          <a:ln/>
-        </p:spPr>
-        <p:txBody>
-          <a:bodyPr wrap="square" rtlCol="0" anchor="t"/>
-          <a:lstStyle/>
-          <a:p>
-            <a:pPr marL="0" indent="0">
-              <a:buNone/>
-            </a:pPr>
-            <a:r>
-              <a:rPr lang="en-US" sz="1250" dirty="0">
-                <a:solidFill>
-                  <a:srgbClr val="5B6B7A"/>
-                </a:solidFill>
-                <a:latin typeface="Calibri" pitchFamily="34" charset="0"/>
-                <a:ea typeface="Calibri" pitchFamily="34" charset="-122"/>
-                <a:cs typeface="Calibri" pitchFamily="34" charset="-120"/>
-              </a:rPr>
-              <a:t>Model y | x as 𝒩(y; ŷ(x;w), σ²). Maximizing the resulting conditional log-likelihood with respect to w is algebraically identical to minimizing MSE_train.</a:t>
-            </a:r>
-            <a:endParaRPr lang="en-US" sz="1250" dirty="0"/>
-          </a:p>
-        </p:txBody>
-      </p:sp>
-      <p:sp>
-        <p:nvSpPr>
-          <p:cNvPr id="8" name="Shape 6"/>
-          <p:cNvSpPr/>
-          <p:nvPr/>
-        </p:nvSpPr>
-        <p:spPr>
-          <a:xfrm>
-            <a:off x="6766560" y="3840480"/>
-            <a:ext cx="4572000" cy="0"/>
-          </a:xfrm>
-          <a:prstGeom prst="line">
-            <a:avLst/>
-          </a:prstGeom>
-          <a:noFill/>
-          <a:ln w="12700">
-            <a:solidFill>
-              <a:srgbClr val="D8E1E8"/>
-            </a:solidFill>
-            <a:prstDash val="solid"/>
-          </a:ln>
-        </p:spPr>
-      </p:sp>
-      <p:sp>
-        <p:nvSpPr>
-          <p:cNvPr id="9" name="Text 7"/>
-          <p:cNvSpPr/>
-          <p:nvPr/>
-        </p:nvSpPr>
-        <p:spPr>
-          <a:xfrm>
-            <a:off x="6766560" y="4023360"/>
-            <a:ext cx="4572000" cy="1828800"/>
-          </a:xfrm>
-          <a:prstGeom prst="rect">
-            <a:avLst/>
-          </a:prstGeom>
-          <a:noFill/>
-          <a:ln/>
-        </p:spPr>
-        <p:txBody>
-          <a:bodyPr wrap="square" rtlCol="0" anchor="t"/>
-          <a:lstStyle/>
-          <a:p>
-            <a:pPr marL="0" indent="0">
-              <a:buNone/>
-            </a:pPr>
-            <a:r>
-              <a:rPr lang="en-US" sz="1300" i="1" dirty="0">
-                <a:solidFill>
-                  <a:srgbClr val="1B2733"/>
-                </a:solidFill>
-                <a:latin typeface="Calibri" pitchFamily="34" charset="0"/>
-                <a:ea typeface="Calibri" pitchFamily="34" charset="-122"/>
-                <a:cs typeface="Calibri" pitchFamily="34" charset="-120"/>
-              </a:rPr>
-              <a:t>This is why MSE “just works” — it's maximum likelihood in disguise, under a Gaussian noise assumption.</a:t>
-            </a:r>
-            <a:endParaRPr lang="en-US" sz="1300" dirty="0"/>
-          </a:p>
-        </p:txBody>
-      </p:sp>
-      <p:sp>
-        <p:nvSpPr>
-          <p:cNvPr id="10" name="Text 8"/>
-          <p:cNvSpPr/>
-          <p:nvPr/>
-        </p:nvSpPr>
-        <p:spPr>
-          <a:xfrm>
-            <a:off x="11365992" y="6400800"/>
-            <a:ext cx="548640" cy="274320"/>
-          </a:xfrm>
-          <a:prstGeom prst="rect">
-            <a:avLst/>
-          </a:prstGeom>
-          <a:noFill/>
-          <a:ln/>
-        </p:spPr>
-        <p:txBody>
-          <a:bodyPr wrap="square" rtlCol="0" anchor="ctr"/>
-          <a:lstStyle/>
-          <a:p>
-            <a:pPr marL="0" indent="0" algn="r">
-              <a:buNone/>
-            </a:pPr>
-            <a:r>
-              <a:rPr lang="en-US" sz="1000" dirty="0">
-                <a:solidFill>
-                  <a:srgbClr val="5B6B7A"/>
-                </a:solidFill>
-                <a:latin typeface="Calibri" pitchFamily="34" charset="0"/>
-                <a:ea typeface="Calibri" pitchFamily="34" charset="-122"/>
-                <a:cs typeface="Calibri" pitchFamily="34" charset="-120"/>
-              </a:rPr>
-              <a:t>20</a:t>
-            </a:r>
-            <a:endParaRPr lang="en-US" sz="1000" dirty="0"/>
-          </a:p>
-        </p:txBody>
-      </p:sp>
-    </p:spTree>
-  </p:cSld>
-  <p:clrMapOvr>
-    <a:masterClrMapping/>
-  </p:clrMapOvr>
-</p:sld>
-</file>
-
-<file path=ppt/slides/slide14.xml><?xml version="1.0" encoding="utf-8"?>
-<p:sld xmlns:a="http://schemas.openxmlformats.org/drawingml/2006/main" xmlns:r="http://schemas.openxmlformats.org/officeDocument/2006/relationships" xmlns:p="http://schemas.openxmlformats.org/presentationml/2006/main">
-  <p:cSld>
-    <p:spTree>
-      <p:nvGrpSpPr>
         <p:cNvPr id="1" name="">
           <a:extLst>
             <a:ext uri="{FF2B5EF4-FFF2-40B4-BE49-F238E27FC236}">
@@ -9351,8 +6447,8 @@
           <a:chExt cx="0" cy="0"/>
         </a:xfrm>
       </p:grpSpPr>
-      <mc:AlternateContent xmlns:mc="http://schemas.openxmlformats.org/markup-compatibility/2006">
-        <mc:Choice xmlns:a14="http://schemas.microsoft.com/office/drawing/2010/main" Requires="a14">
+      <mc:AlternateContent xmlns:mc="http://schemas.openxmlformats.org/markup-compatibility/2006" xmlns:a14="http://schemas.microsoft.com/office/drawing/2010/main">
+        <mc:Choice Requires="a14">
           <p:sp>
             <p:nvSpPr>
               <p:cNvPr id="3" name="Text 1"/>
@@ -9445,7 +6541,7 @@
             </p:txBody>
           </p:sp>
         </mc:Choice>
-        <mc:Fallback>
+        <mc:Fallback xmlns="">
           <p:sp>
             <p:nvSpPr>
               <p:cNvPr id="3" name="Text 1"/>
@@ -9623,8 +6719,8 @@
           </a:p>
         </p:txBody>
       </p:sp>
-      <mc:AlternateContent xmlns:mc="http://schemas.openxmlformats.org/markup-compatibility/2006">
-        <mc:Choice xmlns:a14="http://schemas.microsoft.com/office/drawing/2010/main" Requires="a14">
+      <mc:AlternateContent xmlns:mc="http://schemas.openxmlformats.org/markup-compatibility/2006" xmlns:a14="http://schemas.microsoft.com/office/drawing/2010/main">
+        <mc:Choice Requires="a14">
           <p:sp>
             <p:nvSpPr>
               <p:cNvPr id="8" name="Text 6"/>
@@ -9693,18 +6789,7 @@
                         <a:ea typeface="Calibri" pitchFamily="34" charset="-122"/>
                         <a:cs typeface="Calibri" pitchFamily="34" charset="-120"/>
                       </a:rPr>
-                      <m:t>ⁿ→{</m:t>
-                    </m:r>
-                    <m:r>
-                      <a:rPr lang="en-US" sz="1600" i="1" dirty="0" smtClean="0">
-                        <a:solidFill>
-                          <a:sysClr val="windowText" lastClr="000000"/>
-                        </a:solidFill>
-                        <a:latin typeface="Cambria Math" panose="02040503050406030204" pitchFamily="18" charset="0"/>
-                        <a:ea typeface="Calibri" pitchFamily="34" charset="-122"/>
-                        <a:cs typeface="Calibri" pitchFamily="34" charset="-120"/>
-                      </a:rPr>
-                      <m:t>1,…,</m:t>
+                      <m:t>ⁿ→{1,…,</m:t>
                     </m:r>
                     <m:r>
                       <a:rPr lang="en-US" sz="1600" i="1" dirty="0" smtClean="0">
@@ -9750,7 +6835,7 @@
             </p:txBody>
           </p:sp>
         </mc:Choice>
-        <mc:Fallback>
+        <mc:Fallback xmlns="">
           <p:sp>
             <p:nvSpPr>
               <p:cNvPr id="8" name="Text 6"/>
@@ -9928,8 +7013,8 @@
           </a:p>
         </p:txBody>
       </p:sp>
-      <mc:AlternateContent xmlns:mc="http://schemas.openxmlformats.org/markup-compatibility/2006">
-        <mc:Choice xmlns:a14="http://schemas.microsoft.com/office/drawing/2010/main" Requires="a14">
+      <mc:AlternateContent xmlns:mc="http://schemas.openxmlformats.org/markup-compatibility/2006" xmlns:a14="http://schemas.microsoft.com/office/drawing/2010/main">
+        <mc:Choice Requires="a14">
           <p:sp>
             <p:nvSpPr>
               <p:cNvPr id="13" name="Text 11"/>
@@ -10033,7 +7118,7 @@
             </p:txBody>
           </p:sp>
         </mc:Choice>
-        <mc:Fallback>
+        <mc:Fallback xmlns="">
           <p:sp>
             <p:nvSpPr>
               <p:cNvPr id="13" name="Text 11"/>
@@ -11116,8 +8201,8 @@
           </a:p>
         </p:txBody>
       </p:sp>
-      <mc:AlternateContent xmlns:mc="http://schemas.openxmlformats.org/markup-compatibility/2006">
-        <mc:Choice xmlns:a14="http://schemas.microsoft.com/office/drawing/2010/main" Requires="a14">
+      <mc:AlternateContent xmlns:mc="http://schemas.openxmlformats.org/markup-compatibility/2006" xmlns:a14="http://schemas.microsoft.com/office/drawing/2010/main">
+        <mc:Choice Requires="a14">
           <p:sp>
             <p:nvSpPr>
               <p:cNvPr id="43" name="Text 41"/>
@@ -11362,7 +8447,7 @@
             </p:txBody>
           </p:sp>
         </mc:Choice>
-        <mc:Fallback>
+        <mc:Fallback xmlns="">
           <p:sp>
             <p:nvSpPr>
               <p:cNvPr id="43" name="Text 41"/>
@@ -11742,8 +8827,8 @@
           </a:p>
         </p:txBody>
       </p:sp>
-      <mc:AlternateContent xmlns:mc="http://schemas.openxmlformats.org/markup-compatibility/2006">
-        <mc:Choice xmlns:a14="http://schemas.microsoft.com/office/drawing/2010/main" Requires="a14">
+      <mc:AlternateContent xmlns:mc="http://schemas.openxmlformats.org/markup-compatibility/2006" xmlns:a14="http://schemas.microsoft.com/office/drawing/2010/main">
+        <mc:Choice Requires="a14">
           <p:sp>
             <p:nvSpPr>
               <p:cNvPr id="9" name="Text 7"/>
@@ -12231,7 +9316,7 @@
             </p:txBody>
           </p:sp>
         </mc:Choice>
-        <mc:Fallback>
+        <mc:Fallback xmlns="">
           <p:sp>
             <p:nvSpPr>
               <p:cNvPr id="9" name="Text 7"/>
@@ -12409,8 +9494,8 @@
           </a:p>
         </p:txBody>
       </p:sp>
-      <mc:AlternateContent xmlns:mc="http://schemas.openxmlformats.org/markup-compatibility/2006">
-        <mc:Choice xmlns:a14="http://schemas.microsoft.com/office/drawing/2010/main" Requires="a14">
+      <mc:AlternateContent xmlns:mc="http://schemas.openxmlformats.org/markup-compatibility/2006" xmlns:a14="http://schemas.microsoft.com/office/drawing/2010/main">
+        <mc:Choice Requires="a14">
           <p:sp>
             <p:nvSpPr>
               <p:cNvPr id="6" name="Text 4"/>
@@ -12488,6 +9573,7 @@
                     </m:r>
                   </m:oMath>
                 </a14:m>
+                <a:endParaRPr lang="en-US" dirty="0"/>
               </a:p>
               <a:p>
                 <a:pPr marL="0" indent="0">
@@ -12632,11 +9718,12 @@
                     </m:r>
                   </m:oMath>
                 </a14:m>
+                <a:endParaRPr lang="en-US" dirty="0"/>
               </a:p>
             </p:txBody>
           </p:sp>
         </mc:Choice>
-        <mc:Fallback>
+        <mc:Fallback xmlns="">
           <p:sp>
             <p:nvSpPr>
               <p:cNvPr id="6" name="Text 4"/>
@@ -12746,8 +9833,8 @@
           </a:p>
         </p:txBody>
       </p:sp>
-      <mc:AlternateContent xmlns:mc="http://schemas.openxmlformats.org/markup-compatibility/2006">
-        <mc:Choice xmlns:a14="http://schemas.microsoft.com/office/drawing/2010/main" Requires="a14">
+      <mc:AlternateContent xmlns:mc="http://schemas.openxmlformats.org/markup-compatibility/2006" xmlns:a14="http://schemas.microsoft.com/office/drawing/2010/main">
+        <mc:Choice Requires="a14">
           <p:sp>
             <p:nvSpPr>
               <p:cNvPr id="10" name="Text 8"/>
@@ -13064,7 +10151,7 @@
             </p:txBody>
           </p:sp>
         </mc:Choice>
-        <mc:Fallback>
+        <mc:Fallback xmlns="">
           <p:sp>
             <p:nvSpPr>
               <p:cNvPr id="10" name="Text 8"/>
